--- a/Reports/PRT661_Assessment_3.pptx
+++ b/Reports/PRT661_Assessment_3.pptx
@@ -7775,7 +7775,7 @@
             <a:blipFill>
               <a:blip r:embed="rId2"/>
               <a:stretch>
-                <a:fillRect l="0" t="-27" r="0" b="-25"/>
+                <a:fillRect l="0" t="-138" r="0" b="-136"/>
               </a:stretch>
             </a:blipFill>
           </p:spPr>
@@ -7836,7 +7836,7 @@
             <a:blipFill>
               <a:blip r:embed="rId3"/>
               <a:stretch>
-                <a:fillRect l="0" t="-30" r="0" b="-30"/>
+                <a:fillRect l="-67" t="0" r="-67" b="0"/>
               </a:stretch>
             </a:blipFill>
           </p:spPr>
@@ -7979,7 +7979,7 @@
             </a:custGeom>
             <a:solidFill>
               <a:srgbClr val="FFFFFF">
-                <a:alpha val="54118"/>
+                <a:alpha val="29020"/>
               </a:srgbClr>
             </a:solidFill>
           </p:spPr>
@@ -8056,7 +8056,7 @@
             </a:custGeom>
             <a:solidFill>
               <a:srgbClr val="FFFFFF">
-                <a:alpha val="54118"/>
+                <a:alpha val="29020"/>
               </a:srgbClr>
             </a:solidFill>
           </p:spPr>
@@ -8133,7 +8133,7 @@
             </a:custGeom>
             <a:solidFill>
               <a:srgbClr val="FFFFFF">
-                <a:alpha val="44706"/>
+                <a:alpha val="19608"/>
               </a:srgbClr>
             </a:solidFill>
           </p:spPr>
@@ -8148,9 +8148,9 @@
         <p:grpSpPr>
           <a:xfrm rot="0">
             <a:off x="6139263" y="6156322"/>
-            <a:ext cx="6683397" cy="1804673"/>
+            <a:ext cx="6683407" cy="1804702"/>
             <a:chOff x="0" y="0"/>
-            <a:chExt cx="8911196" cy="2406231"/>
+            <a:chExt cx="8911209" cy="2406269"/>
           </a:xfrm>
         </p:grpSpPr>
         <p:sp>
@@ -8194,7 +8194,7 @@
             <a:blipFill>
               <a:blip r:embed="rId4"/>
               <a:stretch>
-                <a:fillRect l="0" t="0" r="0" b="1"/>
+                <a:fillRect l="0" t="0" r="0" b="0"/>
               </a:stretch>
             </a:blipFill>
           </p:spPr>
@@ -8208,8 +8208,8 @@
         </p:nvSpPr>
         <p:spPr>
           <a:xfrm rot="0">
-            <a:off x="1411443" y="628574"/>
-            <a:ext cx="11817125" cy="665712"/>
+            <a:off x="1411443" y="599999"/>
+            <a:ext cx="11817125" cy="694287"/>
           </a:xfrm>
           <a:prstGeom prst="rect">
             <a:avLst/>
@@ -8249,8 +8249,8 @@
         </p:nvSpPr>
         <p:spPr>
           <a:xfrm rot="0">
-            <a:off x="1291438" y="1726673"/>
-            <a:ext cx="7317124" cy="307610"/>
+            <a:off x="1291438" y="1717148"/>
+            <a:ext cx="7317124" cy="317135"/>
           </a:xfrm>
           <a:prstGeom prst="rect">
             <a:avLst/>
@@ -8290,8 +8290,8 @@
         </p:nvSpPr>
         <p:spPr>
           <a:xfrm rot="0">
-            <a:off x="1291438" y="2136667"/>
-            <a:ext cx="7317124" cy="200025"/>
+            <a:off x="1291438" y="2127142"/>
+            <a:ext cx="7317124" cy="209550"/>
           </a:xfrm>
           <a:prstGeom prst="rect">
             <a:avLst/>
@@ -8331,8 +8331,8 @@
         </p:nvSpPr>
         <p:spPr>
           <a:xfrm rot="0">
-            <a:off x="1411443" y="2627624"/>
-            <a:ext cx="2167118" cy="226657"/>
+            <a:off x="1411443" y="2608574"/>
+            <a:ext cx="2167118" cy="245707"/>
           </a:xfrm>
           <a:prstGeom prst="rect">
             <a:avLst/>
@@ -8372,8 +8372,8 @@
         </p:nvSpPr>
         <p:spPr>
           <a:xfrm rot="0">
-            <a:off x="3761442" y="2627624"/>
-            <a:ext cx="1517123" cy="226657"/>
+            <a:off x="3761442" y="2608574"/>
+            <a:ext cx="1517123" cy="245707"/>
           </a:xfrm>
           <a:prstGeom prst="rect">
             <a:avLst/>
@@ -8413,8 +8413,8 @@
         </p:nvSpPr>
         <p:spPr>
           <a:xfrm rot="0">
-            <a:off x="5461444" y="2627624"/>
-            <a:ext cx="1517123" cy="226657"/>
+            <a:off x="5461444" y="2608574"/>
+            <a:ext cx="1517123" cy="245707"/>
           </a:xfrm>
           <a:prstGeom prst="rect">
             <a:avLst/>
@@ -8454,8 +8454,8 @@
         </p:nvSpPr>
         <p:spPr>
           <a:xfrm rot="0">
-            <a:off x="7161438" y="2627624"/>
-            <a:ext cx="1567120" cy="226657"/>
+            <a:off x="7161438" y="2608574"/>
+            <a:ext cx="1567120" cy="245707"/>
           </a:xfrm>
           <a:prstGeom prst="rect">
             <a:avLst/>
@@ -8495,8 +8495,8 @@
         </p:nvSpPr>
         <p:spPr>
           <a:xfrm rot="0">
-            <a:off x="1411443" y="3026674"/>
-            <a:ext cx="2167118" cy="277606"/>
+            <a:off x="1411443" y="3017149"/>
+            <a:ext cx="2167118" cy="287131"/>
           </a:xfrm>
           <a:prstGeom prst="rect">
             <a:avLst/>
@@ -8536,8 +8536,8 @@
         </p:nvSpPr>
         <p:spPr>
           <a:xfrm rot="0">
-            <a:off x="3761442" y="3026674"/>
-            <a:ext cx="1517123" cy="277606"/>
+            <a:off x="3761442" y="3017149"/>
+            <a:ext cx="1517123" cy="287131"/>
           </a:xfrm>
           <a:prstGeom prst="rect">
             <a:avLst/>
@@ -8577,8 +8577,8 @@
         </p:nvSpPr>
         <p:spPr>
           <a:xfrm rot="0">
-            <a:off x="5461444" y="3026674"/>
-            <a:ext cx="1517123" cy="277606"/>
+            <a:off x="5461444" y="3017149"/>
+            <a:ext cx="1517123" cy="287131"/>
           </a:xfrm>
           <a:prstGeom prst="rect">
             <a:avLst/>
@@ -8618,8 +8618,8 @@
         </p:nvSpPr>
         <p:spPr>
           <a:xfrm rot="0">
-            <a:off x="7161438" y="3026674"/>
-            <a:ext cx="1567120" cy="277606"/>
+            <a:off x="7161438" y="3017149"/>
+            <a:ext cx="1567120" cy="287131"/>
           </a:xfrm>
           <a:prstGeom prst="rect">
             <a:avLst/>
@@ -8659,8 +8659,8 @@
         </p:nvSpPr>
         <p:spPr>
           <a:xfrm rot="0">
-            <a:off x="1411443" y="3486674"/>
-            <a:ext cx="2167118" cy="277606"/>
+            <a:off x="1411443" y="3477149"/>
+            <a:ext cx="2167118" cy="287131"/>
           </a:xfrm>
           <a:prstGeom prst="rect">
             <a:avLst/>
@@ -8700,8 +8700,8 @@
         </p:nvSpPr>
         <p:spPr>
           <a:xfrm rot="0">
-            <a:off x="3761442" y="3486674"/>
-            <a:ext cx="1517123" cy="277606"/>
+            <a:off x="3761442" y="3477149"/>
+            <a:ext cx="1517123" cy="287131"/>
           </a:xfrm>
           <a:prstGeom prst="rect">
             <a:avLst/>
@@ -8741,8 +8741,8 @@
         </p:nvSpPr>
         <p:spPr>
           <a:xfrm rot="0">
-            <a:off x="5461444" y="3486674"/>
-            <a:ext cx="1517123" cy="277606"/>
+            <a:off x="5461444" y="3477149"/>
+            <a:ext cx="1517123" cy="287131"/>
           </a:xfrm>
           <a:prstGeom prst="rect">
             <a:avLst/>
@@ -8782,8 +8782,8 @@
         </p:nvSpPr>
         <p:spPr>
           <a:xfrm rot="0">
-            <a:off x="7161438" y="3486674"/>
-            <a:ext cx="1567120" cy="277606"/>
+            <a:off x="7161438" y="3477149"/>
+            <a:ext cx="1567120" cy="287131"/>
           </a:xfrm>
           <a:prstGeom prst="rect">
             <a:avLst/>
@@ -8823,8 +8823,8 @@
         </p:nvSpPr>
         <p:spPr>
           <a:xfrm rot="0">
-            <a:off x="1411443" y="3946674"/>
-            <a:ext cx="2167118" cy="277606"/>
+            <a:off x="1411443" y="3937149"/>
+            <a:ext cx="2167118" cy="287131"/>
           </a:xfrm>
           <a:prstGeom prst="rect">
             <a:avLst/>
@@ -8864,8 +8864,8 @@
         </p:nvSpPr>
         <p:spPr>
           <a:xfrm rot="0">
-            <a:off x="3761442" y="3946674"/>
-            <a:ext cx="1517123" cy="277606"/>
+            <a:off x="3761442" y="3937149"/>
+            <a:ext cx="1517123" cy="287131"/>
           </a:xfrm>
           <a:prstGeom prst="rect">
             <a:avLst/>
@@ -8905,8 +8905,8 @@
         </p:nvSpPr>
         <p:spPr>
           <a:xfrm rot="0">
-            <a:off x="5461444" y="3946674"/>
-            <a:ext cx="1517123" cy="277606"/>
+            <a:off x="5461444" y="3937149"/>
+            <a:ext cx="1517123" cy="287131"/>
           </a:xfrm>
           <a:prstGeom prst="rect">
             <a:avLst/>
@@ -8946,8 +8946,8 @@
         </p:nvSpPr>
         <p:spPr>
           <a:xfrm rot="0">
-            <a:off x="7161438" y="3946674"/>
-            <a:ext cx="1567120" cy="277606"/>
+            <a:off x="7161438" y="3937149"/>
+            <a:ext cx="1567120" cy="287131"/>
           </a:xfrm>
           <a:prstGeom prst="rect">
             <a:avLst/>
@@ -8987,8 +8987,8 @@
         </p:nvSpPr>
         <p:spPr>
           <a:xfrm rot="0">
-            <a:off x="1411443" y="4406675"/>
-            <a:ext cx="2167118" cy="277606"/>
+            <a:off x="1411443" y="4397150"/>
+            <a:ext cx="2167118" cy="287131"/>
           </a:xfrm>
           <a:prstGeom prst="rect">
             <a:avLst/>
@@ -9028,8 +9028,8 @@
         </p:nvSpPr>
         <p:spPr>
           <a:xfrm rot="0">
-            <a:off x="3761442" y="4406675"/>
-            <a:ext cx="1517123" cy="277606"/>
+            <a:off x="3761442" y="4397150"/>
+            <a:ext cx="1517123" cy="287131"/>
           </a:xfrm>
           <a:prstGeom prst="rect">
             <a:avLst/>
@@ -9069,8 +9069,8 @@
         </p:nvSpPr>
         <p:spPr>
           <a:xfrm rot="0">
-            <a:off x="5461444" y="4406675"/>
-            <a:ext cx="1517123" cy="277606"/>
+            <a:off x="5461444" y="4397150"/>
+            <a:ext cx="1517123" cy="287131"/>
           </a:xfrm>
           <a:prstGeom prst="rect">
             <a:avLst/>
@@ -9110,8 +9110,8 @@
         </p:nvSpPr>
         <p:spPr>
           <a:xfrm rot="0">
-            <a:off x="7161438" y="4406675"/>
-            <a:ext cx="1567120" cy="277606"/>
+            <a:off x="7161438" y="4397150"/>
+            <a:ext cx="1567120" cy="287131"/>
           </a:xfrm>
           <a:prstGeom prst="rect">
             <a:avLst/>
@@ -9151,8 +9151,8 @@
         </p:nvSpPr>
         <p:spPr>
           <a:xfrm rot="0">
-            <a:off x="9691440" y="1726673"/>
-            <a:ext cx="7317124" cy="307610"/>
+            <a:off x="9691440" y="1717148"/>
+            <a:ext cx="7317124" cy="317135"/>
           </a:xfrm>
           <a:prstGeom prst="rect">
             <a:avLst/>
@@ -9192,8 +9192,8 @@
         </p:nvSpPr>
         <p:spPr>
           <a:xfrm rot="0">
-            <a:off x="9691440" y="2136667"/>
-            <a:ext cx="7317124" cy="200025"/>
+            <a:off x="9691440" y="2127142"/>
+            <a:ext cx="7317124" cy="209550"/>
           </a:xfrm>
           <a:prstGeom prst="rect">
             <a:avLst/>
@@ -9233,8 +9233,8 @@
         </p:nvSpPr>
         <p:spPr>
           <a:xfrm rot="0">
-            <a:off x="9811436" y="2627624"/>
-            <a:ext cx="2167118" cy="226657"/>
+            <a:off x="9811436" y="2608574"/>
+            <a:ext cx="2167118" cy="245707"/>
           </a:xfrm>
           <a:prstGeom prst="rect">
             <a:avLst/>
@@ -9274,8 +9274,8 @@
         </p:nvSpPr>
         <p:spPr>
           <a:xfrm rot="0">
-            <a:off x="12161444" y="2627624"/>
-            <a:ext cx="1517123" cy="226657"/>
+            <a:off x="12161444" y="2608574"/>
+            <a:ext cx="1517123" cy="245707"/>
           </a:xfrm>
           <a:prstGeom prst="rect">
             <a:avLst/>
@@ -9315,8 +9315,8 @@
         </p:nvSpPr>
         <p:spPr>
           <a:xfrm rot="0">
-            <a:off x="13861437" y="2627624"/>
-            <a:ext cx="1517123" cy="226657"/>
+            <a:off x="13861437" y="2608574"/>
+            <a:ext cx="1517123" cy="245707"/>
           </a:xfrm>
           <a:prstGeom prst="rect">
             <a:avLst/>
@@ -9356,8 +9356,8 @@
         </p:nvSpPr>
         <p:spPr>
           <a:xfrm rot="0">
-            <a:off x="15561440" y="2627624"/>
-            <a:ext cx="1567120" cy="226657"/>
+            <a:off x="15561440" y="2608574"/>
+            <a:ext cx="1567120" cy="245707"/>
           </a:xfrm>
           <a:prstGeom prst="rect">
             <a:avLst/>
@@ -9397,8 +9397,8 @@
         </p:nvSpPr>
         <p:spPr>
           <a:xfrm rot="0">
-            <a:off x="9811436" y="3026674"/>
-            <a:ext cx="2167118" cy="277606"/>
+            <a:off x="9811436" y="3017149"/>
+            <a:ext cx="2167118" cy="287131"/>
           </a:xfrm>
           <a:prstGeom prst="rect">
             <a:avLst/>
@@ -9438,8 +9438,8 @@
         </p:nvSpPr>
         <p:spPr>
           <a:xfrm rot="0">
-            <a:off x="12161444" y="3026674"/>
-            <a:ext cx="1517123" cy="277606"/>
+            <a:off x="12161444" y="3017149"/>
+            <a:ext cx="1517123" cy="287131"/>
           </a:xfrm>
           <a:prstGeom prst="rect">
             <a:avLst/>
@@ -9479,8 +9479,8 @@
         </p:nvSpPr>
         <p:spPr>
           <a:xfrm rot="0">
-            <a:off x="13861437" y="3026674"/>
-            <a:ext cx="1517123" cy="277606"/>
+            <a:off x="13861437" y="3017149"/>
+            <a:ext cx="1517123" cy="287131"/>
           </a:xfrm>
           <a:prstGeom prst="rect">
             <a:avLst/>
@@ -9520,8 +9520,8 @@
         </p:nvSpPr>
         <p:spPr>
           <a:xfrm rot="0">
-            <a:off x="15561440" y="3026674"/>
-            <a:ext cx="1567120" cy="277606"/>
+            <a:off x="15561440" y="3017149"/>
+            <a:ext cx="1567120" cy="287131"/>
           </a:xfrm>
           <a:prstGeom prst="rect">
             <a:avLst/>
@@ -9561,8 +9561,8 @@
         </p:nvSpPr>
         <p:spPr>
           <a:xfrm rot="0">
-            <a:off x="9811436" y="3486674"/>
-            <a:ext cx="2167118" cy="209550"/>
+            <a:off x="9811436" y="3477149"/>
+            <a:ext cx="2167118" cy="219075"/>
           </a:xfrm>
           <a:prstGeom prst="rect">
             <a:avLst/>
@@ -9589,7 +9589,7 @@
                 <a:cs typeface="Poppins"/>
                 <a:sym typeface="Poppins"/>
               </a:rPr>
-              <a:t>Ridge (a=1)</a:t>
+              <a:t>Ridge (a=0.1)</a:t>
             </a:r>
           </a:p>
         </p:txBody>
@@ -9602,8 +9602,8 @@
         </p:nvSpPr>
         <p:spPr>
           <a:xfrm rot="0">
-            <a:off x="12161444" y="3486674"/>
-            <a:ext cx="1517123" cy="209550"/>
+            <a:off x="12161444" y="3477149"/>
+            <a:ext cx="1517123" cy="219075"/>
           </a:xfrm>
           <a:prstGeom prst="rect">
             <a:avLst/>
@@ -9630,7 +9630,7 @@
                 <a:cs typeface="Poppins"/>
                 <a:sym typeface="Poppins"/>
               </a:rPr>
-              <a:t>0.1607</a:t>
+              <a:t>0.1327</a:t>
             </a:r>
           </a:p>
         </p:txBody>
@@ -9643,8 +9643,8 @@
         </p:nvSpPr>
         <p:spPr>
           <a:xfrm rot="0">
-            <a:off x="13861437" y="3486674"/>
-            <a:ext cx="1517123" cy="209550"/>
+            <a:off x="13861437" y="3477149"/>
+            <a:ext cx="1517123" cy="219075"/>
           </a:xfrm>
           <a:prstGeom prst="rect">
             <a:avLst/>
@@ -9671,7 +9671,7 @@
                 <a:cs typeface="Poppins"/>
                 <a:sym typeface="Poppins"/>
               </a:rPr>
-              <a:t>0.1139</a:t>
+              <a:t>0.0866</a:t>
             </a:r>
           </a:p>
         </p:txBody>
@@ -9684,8 +9684,8 @@
         </p:nvSpPr>
         <p:spPr>
           <a:xfrm rot="0">
-            <a:off x="15561440" y="3486674"/>
-            <a:ext cx="1567120" cy="209550"/>
+            <a:off x="15561440" y="3477149"/>
+            <a:ext cx="1567120" cy="219075"/>
           </a:xfrm>
           <a:prstGeom prst="rect">
             <a:avLst/>
@@ -9712,7 +9712,7 @@
                 <a:cs typeface="Poppins"/>
                 <a:sym typeface="Poppins"/>
               </a:rPr>
-              <a:t>79.8</a:t>
+              <a:t>60.2</a:t>
             </a:r>
           </a:p>
         </p:txBody>
@@ -9725,8 +9725,8 @@
         </p:nvSpPr>
         <p:spPr>
           <a:xfrm rot="0">
-            <a:off x="9811436" y="3946674"/>
-            <a:ext cx="2167118" cy="277606"/>
+            <a:off x="9811436" y="3937149"/>
+            <a:ext cx="2167118" cy="287131"/>
           </a:xfrm>
           <a:prstGeom prst="rect">
             <a:avLst/>
@@ -9766,8 +9766,8 @@
         </p:nvSpPr>
         <p:spPr>
           <a:xfrm rot="0">
-            <a:off x="12161444" y="3946674"/>
-            <a:ext cx="1517123" cy="277606"/>
+            <a:off x="12161444" y="3937149"/>
+            <a:ext cx="1517123" cy="287131"/>
           </a:xfrm>
           <a:prstGeom prst="rect">
             <a:avLst/>
@@ -9807,8 +9807,8 @@
         </p:nvSpPr>
         <p:spPr>
           <a:xfrm rot="0">
-            <a:off x="13861437" y="3946674"/>
-            <a:ext cx="1517123" cy="277606"/>
+            <a:off x="13861437" y="3937149"/>
+            <a:ext cx="1517123" cy="287131"/>
           </a:xfrm>
           <a:prstGeom prst="rect">
             <a:avLst/>
@@ -9848,8 +9848,8 @@
         </p:nvSpPr>
         <p:spPr>
           <a:xfrm rot="0">
-            <a:off x="15561440" y="3946674"/>
-            <a:ext cx="1567120" cy="277606"/>
+            <a:off x="15561440" y="3937149"/>
+            <a:ext cx="1567120" cy="287131"/>
           </a:xfrm>
           <a:prstGeom prst="rect">
             <a:avLst/>
@@ -9889,8 +9889,8 @@
         </p:nvSpPr>
         <p:spPr>
           <a:xfrm rot="0">
-            <a:off x="9811436" y="4406675"/>
-            <a:ext cx="2167118" cy="277606"/>
+            <a:off x="9811436" y="4397150"/>
+            <a:ext cx="2167118" cy="287131"/>
           </a:xfrm>
           <a:prstGeom prst="rect">
             <a:avLst/>
@@ -9930,8 +9930,8 @@
         </p:nvSpPr>
         <p:spPr>
           <a:xfrm rot="0">
-            <a:off x="12161444" y="4406675"/>
-            <a:ext cx="1517123" cy="209550"/>
+            <a:off x="12161444" y="4397150"/>
+            <a:ext cx="1517123" cy="219075"/>
           </a:xfrm>
           <a:prstGeom prst="rect">
             <a:avLst/>
@@ -9971,8 +9971,8 @@
         </p:nvSpPr>
         <p:spPr>
           <a:xfrm rot="0">
-            <a:off x="13861437" y="4406675"/>
-            <a:ext cx="1517123" cy="209550"/>
+            <a:off x="13861437" y="4397150"/>
+            <a:ext cx="1517123" cy="219075"/>
           </a:xfrm>
           <a:prstGeom prst="rect">
             <a:avLst/>
@@ -10012,8 +10012,8 @@
         </p:nvSpPr>
         <p:spPr>
           <a:xfrm rot="0">
-            <a:off x="15561440" y="4406675"/>
-            <a:ext cx="1567120" cy="209550"/>
+            <a:off x="15561440" y="4397150"/>
+            <a:ext cx="1567120" cy="219075"/>
           </a:xfrm>
           <a:prstGeom prst="rect">
             <a:avLst/>
@@ -10053,8 +10053,8 @@
         </p:nvSpPr>
         <p:spPr>
           <a:xfrm rot="0">
-            <a:off x="1291438" y="5276669"/>
-            <a:ext cx="15717117" cy="238125"/>
+            <a:off x="1291438" y="5267144"/>
+            <a:ext cx="15717117" cy="247650"/>
           </a:xfrm>
           <a:prstGeom prst="rect">
             <a:avLst/>
@@ -10081,7 +10081,7 @@
                 <a:cs typeface="Poppins Bold"/>
                 <a:sym typeface="Poppins Bold"/>
               </a:rPr>
-              <a:t>The alcohol_per_capita coefficient stays small and positive across all models (+0.04 to +0.06)</a:t>
+              <a:t>The alcohol_per_capita coefficient stays small and positive across the linear models (+0.04 to +0.06)</a:t>
             </a:r>
           </a:p>
         </p:txBody>
@@ -10094,8 +10094,8 @@
         </p:nvSpPr>
         <p:spPr>
           <a:xfrm rot="0">
-            <a:off x="1591437" y="8776668"/>
-            <a:ext cx="15117118" cy="400050"/>
+            <a:off x="1591437" y="8767143"/>
+            <a:ext cx="15117118" cy="409575"/>
           </a:xfrm>
           <a:prstGeom prst="rect">
             <a:avLst/>
@@ -10109,7 +10109,7 @@
           <a:p>
             <a:pPr algn="l">
               <a:lnSpc>
-                <a:spcPts val="1558"/>
+                <a:spcPts val="1557"/>
               </a:lnSpc>
             </a:pPr>
             <a:r>
@@ -10262,7 +10262,7 @@
             <a:blipFill>
               <a:blip r:embed="rId2"/>
               <a:stretch>
-                <a:fillRect l="0" t="-27" r="0" b="-25"/>
+                <a:fillRect l="0" t="-138" r="0" b="-136"/>
               </a:stretch>
             </a:blipFill>
           </p:spPr>
@@ -10323,7 +10323,7 @@
             <a:blipFill>
               <a:blip r:embed="rId3"/>
               <a:stretch>
-                <a:fillRect l="0" t="-30" r="0" b="-30"/>
+                <a:fillRect l="-67" t="0" r="-67" b="0"/>
               </a:stretch>
             </a:blipFill>
           </p:spPr>
@@ -10403,8 +10403,8 @@
         </p:nvSpPr>
         <p:spPr>
           <a:xfrm rot="0">
-            <a:off x="1411443" y="628574"/>
-            <a:ext cx="11817125" cy="542925"/>
+            <a:off x="1411443" y="599999"/>
+            <a:ext cx="11817125" cy="571500"/>
           </a:xfrm>
           <a:prstGeom prst="rect">
             <a:avLst/>
@@ -10444,8 +10444,8 @@
         </p:nvSpPr>
         <p:spPr>
           <a:xfrm rot="0">
-            <a:off x="1310097" y="2529364"/>
-            <a:ext cx="7717117" cy="352425"/>
+            <a:off x="1310097" y="2510314"/>
+            <a:ext cx="7717117" cy="371475"/>
           </a:xfrm>
           <a:prstGeom prst="rect">
             <a:avLst/>
@@ -10551,8 +10551,8 @@
         </p:nvSpPr>
         <p:spPr>
           <a:xfrm rot="0">
-            <a:off x="1521543" y="3298688"/>
-            <a:ext cx="13986596" cy="543582"/>
+            <a:off x="1521543" y="3289163"/>
+            <a:ext cx="13986596" cy="553107"/>
           </a:xfrm>
           <a:prstGeom prst="rect">
             <a:avLst/>
@@ -10566,7 +10566,7 @@
           <a:p>
             <a:pPr algn="just">
               <a:lnSpc>
-                <a:spcPts val="2098"/>
+                <a:spcPts val="2097"/>
               </a:lnSpc>
             </a:pPr>
             <a:r>
@@ -10585,7 +10585,7 @@
           <a:p>
             <a:pPr algn="just">
               <a:lnSpc>
-                <a:spcPts val="2098"/>
+                <a:spcPts val="2097"/>
               </a:lnSpc>
             </a:pPr>
             <a:r>
@@ -10677,8 +10677,8 @@
         </p:nvSpPr>
         <p:spPr>
           <a:xfrm rot="0">
-            <a:off x="1521543" y="4258694"/>
-            <a:ext cx="13986596" cy="812883"/>
+            <a:off x="1521543" y="4249169"/>
+            <a:ext cx="13986596" cy="822408"/>
           </a:xfrm>
           <a:prstGeom prst="rect">
             <a:avLst/>
@@ -10692,7 +10692,7 @@
           <a:p>
             <a:pPr algn="just">
               <a:lnSpc>
-                <a:spcPts val="2098"/>
+                <a:spcPts val="2097"/>
               </a:lnSpc>
             </a:pPr>
             <a:r>
@@ -10711,7 +10711,7 @@
           <a:p>
             <a:pPr algn="just">
               <a:lnSpc>
-                <a:spcPts val="2098"/>
+                <a:spcPts val="2097"/>
               </a:lnSpc>
             </a:pPr>
             <a:r>
@@ -10803,8 +10803,8 @@
         </p:nvSpPr>
         <p:spPr>
           <a:xfrm rot="0">
-            <a:off x="1521543" y="5218690"/>
-            <a:ext cx="13986596" cy="543582"/>
+            <a:off x="1521543" y="5209165"/>
+            <a:ext cx="13986596" cy="553107"/>
           </a:xfrm>
           <a:prstGeom prst="rect">
             <a:avLst/>
@@ -10818,7 +10818,7 @@
           <a:p>
             <a:pPr algn="just">
               <a:lnSpc>
-                <a:spcPts val="2098"/>
+                <a:spcPts val="2097"/>
               </a:lnSpc>
             </a:pPr>
             <a:r>
@@ -10837,7 +10837,7 @@
           <a:p>
             <a:pPr algn="just">
               <a:lnSpc>
-                <a:spcPts val="2098"/>
+                <a:spcPts val="2097"/>
               </a:lnSpc>
             </a:pPr>
             <a:r>
@@ -10929,8 +10929,8 @@
         </p:nvSpPr>
         <p:spPr>
           <a:xfrm rot="0">
-            <a:off x="1521543" y="6178687"/>
-            <a:ext cx="13986596" cy="812883"/>
+            <a:off x="1521543" y="6169162"/>
+            <a:ext cx="13986596" cy="822408"/>
           </a:xfrm>
           <a:prstGeom prst="rect">
             <a:avLst/>
@@ -10944,7 +10944,7 @@
           <a:p>
             <a:pPr algn="just">
               <a:lnSpc>
-                <a:spcPts val="2098"/>
+                <a:spcPts val="2097"/>
               </a:lnSpc>
             </a:pPr>
             <a:r>
@@ -10963,7 +10963,7 @@
           <a:p>
             <a:pPr algn="just">
               <a:lnSpc>
-                <a:spcPts val="2098"/>
+                <a:spcPts val="2097"/>
               </a:lnSpc>
             </a:pPr>
             <a:r>
@@ -10976,7 +10976,7 @@
                 <a:cs typeface="Poppins"/>
                 <a:sym typeface="Poppins"/>
               </a:rPr>
-              <a:t>XGBoost outperforms only at h=1 month, not beyond. This is a genuine finding: assault rates are mean-reverting at longer horizons where a simple moving average captures the local level better.</a:t>
+              <a:t>XGBoost outperforms only at h=1 month, not beyond. This is a genuine finding: beyond one month, assault rates follow a slow-moving local level, which a simple moving average captures better.</a:t>
             </a:r>
           </a:p>
         </p:txBody>
@@ -11116,7 +11116,7 @@
             <a:blipFill>
               <a:blip r:embed="rId2"/>
               <a:stretch>
-                <a:fillRect l="0" t="-27" r="0" b="-25"/>
+                <a:fillRect l="0" t="-138" r="0" b="-136"/>
               </a:stretch>
             </a:blipFill>
           </p:spPr>
@@ -11177,7 +11177,7 @@
             <a:blipFill>
               <a:blip r:embed="rId3"/>
               <a:stretch>
-                <a:fillRect l="0" t="-30" r="0" b="-30"/>
+                <a:fillRect l="-67" t="0" r="-67" b="0"/>
               </a:stretch>
             </a:blipFill>
           </p:spPr>
@@ -11257,8 +11257,8 @@
         </p:nvSpPr>
         <p:spPr>
           <a:xfrm rot="0">
-            <a:off x="1411443" y="628574"/>
-            <a:ext cx="11817125" cy="542925"/>
+            <a:off x="1411443" y="599999"/>
+            <a:ext cx="11817125" cy="571500"/>
           </a:xfrm>
           <a:prstGeom prst="rect">
             <a:avLst/>
@@ -11298,8 +11298,8 @@
         </p:nvSpPr>
         <p:spPr>
           <a:xfrm rot="0">
-            <a:off x="1310097" y="2529364"/>
-            <a:ext cx="7717117" cy="352425"/>
+            <a:off x="1310097" y="2510314"/>
+            <a:ext cx="7717117" cy="371475"/>
           </a:xfrm>
           <a:prstGeom prst="rect">
             <a:avLst/>
@@ -11405,8 +11405,8 @@
         </p:nvSpPr>
         <p:spPr>
           <a:xfrm rot="0">
-            <a:off x="1521543" y="3298688"/>
-            <a:ext cx="13986596" cy="790575"/>
+            <a:off x="1521543" y="3289163"/>
+            <a:ext cx="13986596" cy="800100"/>
           </a:xfrm>
           <a:prstGeom prst="rect">
             <a:avLst/>
@@ -11420,7 +11420,7 @@
           <a:p>
             <a:pPr algn="just">
               <a:lnSpc>
-                <a:spcPts val="2098"/>
+                <a:spcPts val="2097"/>
               </a:lnSpc>
             </a:pPr>
             <a:r>
@@ -11439,7 +11439,7 @@
           <a:p>
             <a:pPr algn="just">
               <a:lnSpc>
-                <a:spcPts val="2098"/>
+                <a:spcPts val="2097"/>
               </a:lnSpc>
             </a:pPr>
             <a:r>
@@ -11531,8 +11531,8 @@
         </p:nvSpPr>
         <p:spPr>
           <a:xfrm rot="0">
-            <a:off x="1521543" y="4258694"/>
-            <a:ext cx="13986596" cy="790575"/>
+            <a:off x="1521543" y="4249169"/>
+            <a:ext cx="13986596" cy="800100"/>
           </a:xfrm>
           <a:prstGeom prst="rect">
             <a:avLst/>
@@ -11546,7 +11546,7 @@
           <a:p>
             <a:pPr algn="just">
               <a:lnSpc>
-                <a:spcPts val="2098"/>
+                <a:spcPts val="2097"/>
               </a:lnSpc>
             </a:pPr>
             <a:r>
@@ -11565,7 +11565,7 @@
           <a:p>
             <a:pPr algn="just">
               <a:lnSpc>
-                <a:spcPts val="2098"/>
+                <a:spcPts val="2097"/>
               </a:lnSpc>
             </a:pPr>
             <a:r>
@@ -11657,8 +11657,8 @@
         </p:nvSpPr>
         <p:spPr>
           <a:xfrm rot="0">
-            <a:off x="1521543" y="5218690"/>
-            <a:ext cx="13986596" cy="790575"/>
+            <a:off x="1521543" y="5209165"/>
+            <a:ext cx="13986596" cy="800100"/>
           </a:xfrm>
           <a:prstGeom prst="rect">
             <a:avLst/>
@@ -11672,7 +11672,7 @@
           <a:p>
             <a:pPr algn="just">
               <a:lnSpc>
-                <a:spcPts val="2098"/>
+                <a:spcPts val="2097"/>
               </a:lnSpc>
             </a:pPr>
             <a:r>
@@ -11691,7 +11691,7 @@
           <a:p>
             <a:pPr algn="just">
               <a:lnSpc>
-                <a:spcPts val="2098"/>
+                <a:spcPts val="2097"/>
               </a:lnSpc>
             </a:pPr>
             <a:r>
@@ -11783,8 +11783,8 @@
         </p:nvSpPr>
         <p:spPr>
           <a:xfrm rot="0">
-            <a:off x="1521543" y="6178687"/>
-            <a:ext cx="13986596" cy="790575"/>
+            <a:off x="1521543" y="6169162"/>
+            <a:ext cx="13986596" cy="800100"/>
           </a:xfrm>
           <a:prstGeom prst="rect">
             <a:avLst/>
@@ -11798,7 +11798,7 @@
           <a:p>
             <a:pPr algn="just">
               <a:lnSpc>
-                <a:spcPts val="2098"/>
+                <a:spcPts val="2097"/>
               </a:lnSpc>
             </a:pPr>
             <a:r>
@@ -11817,7 +11817,7 @@
           <a:p>
             <a:pPr algn="just">
               <a:lnSpc>
-                <a:spcPts val="2098"/>
+                <a:spcPts val="2097"/>
               </a:lnSpc>
             </a:pPr>
             <a:r>

--- a/Reports/PRT661_Assessment_3.pptx
+++ b/Reports/PRT661_Assessment_3.pptx
@@ -3458,7 +3458,7 @@
         </p:nvSpPr>
         <p:spPr>
           <a:xfrm rot="0">
-            <a:off x="1028700" y="7441930"/>
+            <a:off x="1215312" y="5917746"/>
             <a:ext cx="6743700" cy="1997250"/>
           </a:xfrm>
           <a:prstGeom prst="rect">
@@ -12443,7 +12443,7 @@
         <p:spPr>
           <a:xfrm rot="0">
             <a:off x="1493834" y="4905375"/>
-            <a:ext cx="13986596" cy="1082192"/>
+            <a:ext cx="13986596" cy="1038201"/>
           </a:xfrm>
           <a:prstGeom prst="rect">
             <a:avLst/>
@@ -12470,7 +12470,7 @@
                 <a:cs typeface="Poppins Bold"/>
                 <a:sym typeface="Poppins Bold"/>
               </a:rPr>
-              <a:t>Streamlit Dashboard  (in development )</a:t>
+              <a:t>Streamlit Dashboard</a:t>
             </a:r>
           </a:p>
           <a:p>
@@ -15019,7 +15019,7 @@
         <p:spPr>
           <a:xfrm rot="0">
             <a:off x="1470003" y="2811894"/>
-            <a:ext cx="7317124" cy="571500"/>
+            <a:ext cx="7317124" cy="552425"/>
           </a:xfrm>
           <a:prstGeom prst="rect">
             <a:avLst/>
@@ -15046,7 +15046,7 @@
                 <a:cs typeface="Poppins"/>
                 <a:sym typeface="Poppins"/>
               </a:rPr>
-              <a:t>XGBoost achieves the best short-horizon accuracy: 29% skill improvement over seasonal naive at h = 1 month</a:t>
+              <a:t>XGBoost achieves the best short-horizon accuracy: about 30% skill improvement over seasonal naive at h = 1 month</a:t>
             </a:r>
           </a:p>
         </p:txBody>
@@ -16071,7 +16071,7 @@
         <p:spPr>
           <a:xfrm rot="0">
             <a:off x="1521543" y="4258694"/>
-            <a:ext cx="13986596" cy="812883"/>
+            <a:ext cx="13986596" cy="781026"/>
           </a:xfrm>
           <a:prstGeom prst="rect">
             <a:avLst/>
@@ -16117,7 +16117,7 @@
                 <a:cs typeface="Poppins"/>
                 <a:sym typeface="Poppins"/>
               </a:rPr>
-              <a:t>an end-to-end forecasting pipeline that predicts monthly assault rates per 100,000 population across 6 NT regions at horizons of 1, 3, 6, and 12 months ahead and deliver an interactive Streamlit dashboard for operational use.</a:t>
+              <a:t>an end-to-end forecasting pipeline that predicts monthly assault rates per 100,000 population across 6 NT regions at horizons of 1, 3, 6, and 12 months ahead and delivers an interactive Streamlit dashboard for operational use.</a:t>
             </a:r>
           </a:p>
         </p:txBody>
@@ -18879,7 +18879,7 @@
         <p:spPr>
           <a:xfrm rot="0">
             <a:off x="1591437" y="7707620"/>
-            <a:ext cx="15117118" cy="238125"/>
+            <a:ext cx="14542591" cy="219075"/>
           </a:xfrm>
           <a:prstGeom prst="rect">
             <a:avLst/>
@@ -18906,7 +18906,7 @@
                 <a:cs typeface="Poppins"/>
                 <a:sym typeface="Poppins"/>
               </a:rPr>
-              <a:t>Alcohol supply data only covers 2023-2025 (12 quarters) - far shorter than the 2015-2025 crime/population window. This limits Model B (Slide 11) to a much smaller sample.</a:t>
+              <a:t>Alcohol supply data only covers 2023-2025 (12 quarters) - far shorter than the 2015-2025 crime/population window. This limits Model B (Slide 14 to a much smaller sample.</a:t>
             </a:r>
           </a:p>
         </p:txBody>
@@ -20755,7 +20755,7 @@
         <p:spPr>
           <a:xfrm rot="0">
             <a:off x="1521543" y="5218690"/>
-            <a:ext cx="13986596" cy="540953"/>
+            <a:ext cx="13986596" cy="781026"/>
           </a:xfrm>
           <a:prstGeom prst="rect">
             <a:avLst/>
@@ -20801,7 +20801,7 @@
                 <a:cs typeface="Poppins"/>
                 <a:sym typeface="Poppins"/>
               </a:rPr>
-              <a:t>TimeSeriesSplit (5 folds) on 2015–2022 → select best feature variant → fit Linear, Ridge(α=1), Lasso(α=0.01), XGBoost(depth=3)</a:t>
+              <a:t>TimeSeriesSplit (5 folds) on 2015–2022 → select best feature variant → fit Linear, Ridge(α=0.1), Lasso(α=0.01), XGBoost(depth=3)</a:t>
             </a:r>
           </a:p>
         </p:txBody>
@@ -28891,8 +28891,8 @@
         </p:nvSpPr>
         <p:spPr>
           <a:xfrm rot="0">
-            <a:off x="1541440" y="4747622"/>
-            <a:ext cx="4417124" cy="296656"/>
+            <a:off x="1541440" y="4650934"/>
+            <a:ext cx="4417124" cy="419100"/>
           </a:xfrm>
           <a:prstGeom prst="rect">
             <a:avLst/>
@@ -28919,7 +28919,26 @@
                 <a:cs typeface="Poppins"/>
                 <a:sym typeface="Poppins"/>
               </a:rPr>
-              <a:t>Last 6 months excluded from training</a:t>
+              <a:t>Last 6 months (provisional) excluded from </a:t>
+            </a:r>
+          </a:p>
+          <a:p>
+            <a:pPr algn="l">
+              <a:lnSpc>
+                <a:spcPts val="1620"/>
+              </a:lnSpc>
+            </a:pPr>
+            <a:r>
+              <a:rPr lang="en-US" sz="1350">
+                <a:solidFill>
+                  <a:srgbClr val="33294B"/>
+                </a:solidFill>
+                <a:latin typeface="Poppins"/>
+                <a:ea typeface="Poppins"/>
+                <a:cs typeface="Poppins"/>
+                <a:sym typeface="Poppins"/>
+              </a:rPr>
+              <a:t>backtest evaluation</a:t>
             </a:r>
           </a:p>
         </p:txBody>

--- a/Reports/PRT661_Assessment_3.pptx
+++ b/Reports/PRT661_Assessment_3.pptx
@@ -4,6 +4,9 @@
   <p:sldMasterIdLst>
     <p:sldMasterId id="2147483648" r:id="rId1"/>
   </p:sldMasterIdLst>
+  <p:notesMasterIdLst>
+    <p:notesMasterId r:id="rId22"/>
+  </p:notesMasterIdLst>
   <p:sldIdLst>
     <p:sldId id="256" r:id="rId2"/>
     <p:sldId id="257" r:id="rId3"/>
@@ -31,35 +34,35 @@
   <p:embeddedFontLst>
     <p:embeddedFont>
       <p:font typeface="Canva Sans 1" panose="020B0604020202020204" charset="0"/>
-      <p:regular r:id="rId22"/>
+      <p:regular r:id="rId23"/>
     </p:embeddedFont>
     <p:embeddedFont>
       <p:font typeface="Canva Sans 1 Bold" panose="020B0604020202020204" charset="0"/>
-      <p:regular r:id="rId23"/>
+      <p:regular r:id="rId24"/>
     </p:embeddedFont>
     <p:embeddedFont>
       <p:font typeface="Open Sans Bold" panose="020B0604020202020204" charset="0"/>
-      <p:regular r:id="rId24"/>
+      <p:regular r:id="rId25"/>
     </p:embeddedFont>
     <p:embeddedFont>
       <p:font typeface="Poppins" panose="00000500000000000000" pitchFamily="2" charset="0"/>
-      <p:regular r:id="rId25"/>
+      <p:regular r:id="rId26"/>
     </p:embeddedFont>
     <p:embeddedFont>
       <p:font typeface="Poppins Bold" panose="00000800000000000000" charset="0"/>
-      <p:regular r:id="rId26"/>
+      <p:regular r:id="rId27"/>
     </p:embeddedFont>
     <p:embeddedFont>
       <p:font typeface="Poppins Bold Italics" panose="020B0604020202020204" charset="0"/>
-      <p:regular r:id="rId27"/>
+      <p:regular r:id="rId28"/>
     </p:embeddedFont>
     <p:embeddedFont>
       <p:font typeface="Poppins Italics" panose="020B0604020202020204" charset="0"/>
-      <p:regular r:id="rId28"/>
+      <p:regular r:id="rId29"/>
     </p:embeddedFont>
     <p:embeddedFont>
       <p:font typeface="Poppins Semi-Bold" panose="020B0604020202020204" charset="0"/>
-      <p:regular r:id="rId29"/>
+      <p:regular r:id="rId30"/>
     </p:embeddedFont>
   </p:embeddedFontLst>
   <p:defaultTextStyle>
@@ -176,6 +179,1431 @@
 </p:presentation>
 </file>
 
+<file path=ppt/notesMasters/notesMaster1.xml><?xml version="1.0" encoding="utf-8"?>
+<p:notesMaster xmlns:a="http://schemas.openxmlformats.org/drawingml/2006/main" xmlns:r="http://schemas.openxmlformats.org/officeDocument/2006/relationships" xmlns:p="http://schemas.openxmlformats.org/presentationml/2006/main">
+  <p:cSld>
+    <p:bg>
+      <p:bgRef idx="1001">
+        <a:schemeClr val="bg1"/>
+      </p:bgRef>
+    </p:bg>
+    <p:spTree>
+      <p:nvGrpSpPr>
+        <p:cNvPr id="1" name=""/>
+        <p:cNvGrpSpPr/>
+        <p:nvPr/>
+      </p:nvGrpSpPr>
+      <p:grpSpPr>
+        <a:xfrm>
+          <a:off x="0" y="0"/>
+          <a:ext cx="0" cy="0"/>
+          <a:chOff x="0" y="0"/>
+          <a:chExt cx="0" cy="0"/>
+        </a:xfrm>
+      </p:grpSpPr>
+      <p:sp>
+        <p:nvSpPr>
+          <p:cNvPr id="2" name="Header Placeholder 1"/>
+          <p:cNvSpPr>
+            <a:spLocks noGrp="1"/>
+          </p:cNvSpPr>
+          <p:nvPr>
+            <p:ph type="hdr" sz="quarter"/>
+          </p:nvPr>
+        </p:nvSpPr>
+        <p:spPr>
+          <a:xfrm>
+            <a:off x="0" y="0"/>
+            <a:ext cx="3962400" cy="342900"/>
+          </a:xfrm>
+          <a:prstGeom prst="rect">
+            <a:avLst/>
+          </a:prstGeom>
+        </p:spPr>
+        <p:txBody>
+          <a:bodyPr vert="horz" lIns="91440" tIns="45720" rIns="91440" bIns="45720" rtlCol="0"/>
+          <a:lstStyle>
+            <a:lvl1pPr algn="l">
+              <a:defRPr sz="1200"/>
+            </a:lvl1pPr>
+          </a:lstStyle>
+          <a:p>
+            <a:endParaRPr lang="cs-CZ"/>
+          </a:p>
+        </p:txBody>
+      </p:sp>
+      <p:sp>
+        <p:nvSpPr>
+          <p:cNvPr id="3" name="Date Placeholder 2"/>
+          <p:cNvSpPr>
+            <a:spLocks noGrp="1"/>
+          </p:cNvSpPr>
+          <p:nvPr>
+            <p:ph type="dt" idx="1"/>
+          </p:nvPr>
+        </p:nvSpPr>
+        <p:spPr>
+          <a:xfrm>
+            <a:off x="5180013" y="0"/>
+            <a:ext cx="3962400" cy="342900"/>
+          </a:xfrm>
+          <a:prstGeom prst="rect">
+            <a:avLst/>
+          </a:prstGeom>
+        </p:spPr>
+        <p:txBody>
+          <a:bodyPr vert="horz" lIns="91440" tIns="45720" rIns="91440" bIns="45720" rtlCol="0"/>
+          <a:lstStyle>
+            <a:lvl1pPr algn="r">
+              <a:defRPr sz="1200"/>
+            </a:lvl1pPr>
+          </a:lstStyle>
+          <a:p>
+            <a:fld id="{B7268E1E-0E44-426D-905E-8AD9B19D2182}" type="datetimeFigureOut">
+              <a:rPr lang="cs-CZ" smtClean="0"/>
+              <a:t>03.10.2026</a:t>
+            </a:fld>
+            <a:endParaRPr lang="cs-CZ"/>
+          </a:p>
+        </p:txBody>
+      </p:sp>
+      <p:sp>
+        <p:nvSpPr>
+          <p:cNvPr id="4" name="Slide Image Placeholder 3"/>
+          <p:cNvSpPr>
+            <a:spLocks noGrp="1" noRot="1" noChangeAspect="1"/>
+          </p:cNvSpPr>
+          <p:nvPr>
+            <p:ph type="sldImg" idx="2"/>
+          </p:nvPr>
+        </p:nvSpPr>
+        <p:spPr>
+          <a:xfrm>
+            <a:off x="2857500" y="512763"/>
+            <a:ext cx="3429000" cy="2566987"/>
+          </a:xfrm>
+          <a:prstGeom prst="rect">
+            <a:avLst/>
+          </a:prstGeom>
+          <a:noFill/>
+          <a:ln w="12700">
+            <a:solidFill>
+              <a:prstClr val="black"/>
+            </a:solidFill>
+          </a:ln>
+        </p:spPr>
+        <p:txBody>
+          <a:bodyPr vert="horz" lIns="91440" tIns="45720" rIns="91440" bIns="45720" rtlCol="0" anchor="ctr"/>
+          <a:lstStyle/>
+          <a:p>
+            <a:endParaRPr lang="cs-CZ"/>
+          </a:p>
+        </p:txBody>
+      </p:sp>
+      <p:sp>
+        <p:nvSpPr>
+          <p:cNvPr id="5" name="Notes Placeholder 4"/>
+          <p:cNvSpPr>
+            <a:spLocks noGrp="1"/>
+          </p:cNvSpPr>
+          <p:nvPr>
+            <p:ph type="body" sz="quarter" idx="3"/>
+          </p:nvPr>
+        </p:nvSpPr>
+        <p:spPr>
+          <a:xfrm>
+            <a:off x="914400" y="3251200"/>
+            <a:ext cx="7315200" cy="3081338"/>
+          </a:xfrm>
+          <a:prstGeom prst="rect">
+            <a:avLst/>
+          </a:prstGeom>
+        </p:spPr>
+        <p:txBody>
+          <a:bodyPr vert="horz" lIns="91440" tIns="45720" rIns="91440" bIns="45720" rtlCol="0"/>
+          <a:lstStyle/>
+          <a:p>
+            <a:pPr lvl="0"/>
+            <a:r>
+              <a:rPr lang="en-US"/>
+              <a:t>Click to edit Master text styles</a:t>
+            </a:r>
+          </a:p>
+          <a:p>
+            <a:pPr lvl="1"/>
+            <a:r>
+              <a:rPr lang="en-US"/>
+              <a:t>Second level</a:t>
+            </a:r>
+          </a:p>
+          <a:p>
+            <a:pPr lvl="2"/>
+            <a:r>
+              <a:rPr lang="en-US"/>
+              <a:t>Third level</a:t>
+            </a:r>
+          </a:p>
+          <a:p>
+            <a:pPr lvl="3"/>
+            <a:r>
+              <a:rPr lang="en-US"/>
+              <a:t>Fourth level</a:t>
+            </a:r>
+          </a:p>
+          <a:p>
+            <a:pPr lvl="4"/>
+            <a:r>
+              <a:rPr lang="en-US"/>
+              <a:t>Fifth level</a:t>
+            </a:r>
+            <a:endParaRPr lang="cs-CZ"/>
+          </a:p>
+        </p:txBody>
+      </p:sp>
+      <p:sp>
+        <p:nvSpPr>
+          <p:cNvPr id="6" name="Footer Placeholder 5"/>
+          <p:cNvSpPr>
+            <a:spLocks noGrp="1"/>
+          </p:cNvSpPr>
+          <p:nvPr>
+            <p:ph type="ftr" sz="quarter" idx="4"/>
+          </p:nvPr>
+        </p:nvSpPr>
+        <p:spPr>
+          <a:xfrm>
+            <a:off x="0" y="6502400"/>
+            <a:ext cx="3962400" cy="341313"/>
+          </a:xfrm>
+          <a:prstGeom prst="rect">
+            <a:avLst/>
+          </a:prstGeom>
+        </p:spPr>
+        <p:txBody>
+          <a:bodyPr vert="horz" lIns="91440" tIns="45720" rIns="91440" bIns="45720" rtlCol="0" anchor="b"/>
+          <a:lstStyle>
+            <a:lvl1pPr algn="l">
+              <a:defRPr sz="1200"/>
+            </a:lvl1pPr>
+          </a:lstStyle>
+          <a:p>
+            <a:endParaRPr lang="cs-CZ"/>
+          </a:p>
+        </p:txBody>
+      </p:sp>
+      <p:sp>
+        <p:nvSpPr>
+          <p:cNvPr id="7" name="Slide Number Placeholder 6"/>
+          <p:cNvSpPr>
+            <a:spLocks noGrp="1"/>
+          </p:cNvSpPr>
+          <p:nvPr>
+            <p:ph type="sldNum" sz="quarter" idx="5"/>
+          </p:nvPr>
+        </p:nvSpPr>
+        <p:spPr>
+          <a:xfrm>
+            <a:off x="5180013" y="6502400"/>
+            <a:ext cx="3962400" cy="341313"/>
+          </a:xfrm>
+          <a:prstGeom prst="rect">
+            <a:avLst/>
+          </a:prstGeom>
+        </p:spPr>
+        <p:txBody>
+          <a:bodyPr vert="horz" lIns="91440" tIns="45720" rIns="91440" bIns="45720" rtlCol="0" anchor="b"/>
+          <a:lstStyle>
+            <a:lvl1pPr algn="r">
+              <a:defRPr sz="1200"/>
+            </a:lvl1pPr>
+          </a:lstStyle>
+          <a:p>
+            <a:fld id="{871B2431-D351-4C6E-A3CF-9DFAC0E3E050}" type="slidenum">
+              <a:rPr lang="cs-CZ" smtClean="0"/>
+              <a:t>‹#›</a:t>
+            </a:fld>
+            <a:endParaRPr lang="cs-CZ"/>
+          </a:p>
+        </p:txBody>
+      </p:sp>
+    </p:spTree>
+    <p:extLst>
+      <p:ext uri="{BB962C8B-B14F-4D97-AF65-F5344CB8AC3E}">
+        <p14:creationId xmlns:p14="http://schemas.microsoft.com/office/powerpoint/2010/main" val="1798889115"/>
+      </p:ext>
+    </p:extLst>
+  </p:cSld>
+  <p:clrMap bg1="lt1" tx1="dk1" bg2="lt2" tx2="dk2" accent1="accent1" accent2="accent2" accent3="accent3" accent4="accent4" accent5="accent5" accent6="accent6" hlink="hlink" folHlink="folHlink"/>
+  <p:notesStyle>
+    <a:lvl1pPr marL="0" algn="l" defTabSz="914400" rtl="0" eaLnBrk="1" latinLnBrk="0" hangingPunct="1">
+      <a:defRPr sz="1200" kern="1200">
+        <a:solidFill>
+          <a:schemeClr val="tx1"/>
+        </a:solidFill>
+        <a:latin typeface="+mn-lt"/>
+        <a:ea typeface="+mn-ea"/>
+        <a:cs typeface="+mn-cs"/>
+      </a:defRPr>
+    </a:lvl1pPr>
+    <a:lvl2pPr marL="457200" algn="l" defTabSz="914400" rtl="0" eaLnBrk="1" latinLnBrk="0" hangingPunct="1">
+      <a:defRPr sz="1200" kern="1200">
+        <a:solidFill>
+          <a:schemeClr val="tx1"/>
+        </a:solidFill>
+        <a:latin typeface="+mn-lt"/>
+        <a:ea typeface="+mn-ea"/>
+        <a:cs typeface="+mn-cs"/>
+      </a:defRPr>
+    </a:lvl2pPr>
+    <a:lvl3pPr marL="914400" algn="l" defTabSz="914400" rtl="0" eaLnBrk="1" latinLnBrk="0" hangingPunct="1">
+      <a:defRPr sz="1200" kern="1200">
+        <a:solidFill>
+          <a:schemeClr val="tx1"/>
+        </a:solidFill>
+        <a:latin typeface="+mn-lt"/>
+        <a:ea typeface="+mn-ea"/>
+        <a:cs typeface="+mn-cs"/>
+      </a:defRPr>
+    </a:lvl3pPr>
+    <a:lvl4pPr marL="1371600" algn="l" defTabSz="914400" rtl="0" eaLnBrk="1" latinLnBrk="0" hangingPunct="1">
+      <a:defRPr sz="1200" kern="1200">
+        <a:solidFill>
+          <a:schemeClr val="tx1"/>
+        </a:solidFill>
+        <a:latin typeface="+mn-lt"/>
+        <a:ea typeface="+mn-ea"/>
+        <a:cs typeface="+mn-cs"/>
+      </a:defRPr>
+    </a:lvl4pPr>
+    <a:lvl5pPr marL="1828800" algn="l" defTabSz="914400" rtl="0" eaLnBrk="1" latinLnBrk="0" hangingPunct="1">
+      <a:defRPr sz="1200" kern="1200">
+        <a:solidFill>
+          <a:schemeClr val="tx1"/>
+        </a:solidFill>
+        <a:latin typeface="+mn-lt"/>
+        <a:ea typeface="+mn-ea"/>
+        <a:cs typeface="+mn-cs"/>
+      </a:defRPr>
+    </a:lvl5pPr>
+    <a:lvl6pPr marL="2286000" algn="l" defTabSz="914400" rtl="0" eaLnBrk="1" latinLnBrk="0" hangingPunct="1">
+      <a:defRPr sz="1200" kern="1200">
+        <a:solidFill>
+          <a:schemeClr val="tx1"/>
+        </a:solidFill>
+        <a:latin typeface="+mn-lt"/>
+        <a:ea typeface="+mn-ea"/>
+        <a:cs typeface="+mn-cs"/>
+      </a:defRPr>
+    </a:lvl6pPr>
+    <a:lvl7pPr marL="2743200" algn="l" defTabSz="914400" rtl="0" eaLnBrk="1" latinLnBrk="0" hangingPunct="1">
+      <a:defRPr sz="1200" kern="1200">
+        <a:solidFill>
+          <a:schemeClr val="tx1"/>
+        </a:solidFill>
+        <a:latin typeface="+mn-lt"/>
+        <a:ea typeface="+mn-ea"/>
+        <a:cs typeface="+mn-cs"/>
+      </a:defRPr>
+    </a:lvl7pPr>
+    <a:lvl8pPr marL="3200400" algn="l" defTabSz="914400" rtl="0" eaLnBrk="1" latinLnBrk="0" hangingPunct="1">
+      <a:defRPr sz="1200" kern="1200">
+        <a:solidFill>
+          <a:schemeClr val="tx1"/>
+        </a:solidFill>
+        <a:latin typeface="+mn-lt"/>
+        <a:ea typeface="+mn-ea"/>
+        <a:cs typeface="+mn-cs"/>
+      </a:defRPr>
+    </a:lvl8pPr>
+    <a:lvl9pPr marL="3657600" algn="l" defTabSz="914400" rtl="0" eaLnBrk="1" latinLnBrk="0" hangingPunct="1">
+      <a:defRPr sz="1200" kern="1200">
+        <a:solidFill>
+          <a:schemeClr val="tx1"/>
+        </a:solidFill>
+        <a:latin typeface="+mn-lt"/>
+        <a:ea typeface="+mn-ea"/>
+        <a:cs typeface="+mn-cs"/>
+      </a:defRPr>
+    </a:lvl9pPr>
+  </p:notesStyle>
+</p:notesMaster>
+</file>
+
+<file path=ppt/notesSlides/notesSlide1.xml><?xml version="1.0" encoding="utf-8"?>
+<p:notes xmlns:a="http://schemas.openxmlformats.org/drawingml/2006/main" xmlns:r="http://schemas.openxmlformats.org/officeDocument/2006/relationships" xmlns:p="http://schemas.openxmlformats.org/presentationml/2006/main">
+  <p:cSld>
+    <p:spTree>
+      <p:nvGrpSpPr>
+        <p:cNvPr id="1" name=""/>
+        <p:cNvGrpSpPr/>
+        <p:nvPr/>
+      </p:nvGrpSpPr>
+      <p:grpSpPr>
+        <a:xfrm>
+          <a:off x="0" y="0"/>
+          <a:ext cx="0" cy="0"/>
+          <a:chOff x="0" y="0"/>
+          <a:chExt cx="0" cy="0"/>
+        </a:xfrm>
+      </p:grpSpPr>
+      <p:sp>
+        <p:nvSpPr>
+          <p:cNvPr id="2" name="Header Placeholder 1"/>
+          <p:cNvSpPr>
+            <a:spLocks noGrp="1"/>
+          </p:cNvSpPr>
+          <p:nvPr>
+            <p:ph type="hdr" sz="quarter"/>
+          </p:nvPr>
+        </p:nvSpPr>
+        <p:spPr>
+          <a:xfrm>
+            <a:off x="0" y="0"/>
+            <a:ext cx="3962400" cy="342900"/>
+          </a:xfrm>
+          <a:prstGeom prst="rect">
+            <a:avLst/>
+          </a:prstGeom>
+        </p:spPr>
+        <p:txBody>
+          <a:bodyPr vert="horz" lIns="91440" tIns="45720" rIns="91440" bIns="45720" rtlCol="0"/>
+          <a:lstStyle>
+            <a:lvl1pPr algn="l">
+              <a:defRPr sz="1200"/>
+            </a:lvl1pPr>
+          </a:lstStyle>
+          <a:p>
+            <a:endParaRPr/>
+          </a:p>
+        </p:txBody>
+      </p:sp>
+      <p:sp>
+        <p:nvSpPr>
+          <p:cNvPr id="3" name="Date Placeholder 2"/>
+          <p:cNvSpPr>
+            <a:spLocks noGrp="1"/>
+          </p:cNvSpPr>
+          <p:nvPr>
+            <p:ph type="dt" idx="1"/>
+          </p:nvPr>
+        </p:nvSpPr>
+        <p:spPr>
+          <a:xfrm>
+            <a:off x="5180013" y="0"/>
+            <a:ext cx="3962400" cy="342900"/>
+          </a:xfrm>
+          <a:prstGeom prst="rect">
+            <a:avLst/>
+          </a:prstGeom>
+        </p:spPr>
+        <p:txBody>
+          <a:bodyPr vert="horz" lIns="91440" tIns="45720" rIns="91440" bIns="45720" rtlCol="0"/>
+          <a:lstStyle>
+            <a:lvl1pPr algn="r">
+              <a:defRPr sz="1200"/>
+            </a:lvl1pPr>
+          </a:lstStyle>
+          <a:p>
+            <a:r>
+              <a:rPr lang="cs-CZ"/>
+              <a:t>1.7.2013</a:t>
+            </a:r>
+          </a:p>
+        </p:txBody>
+      </p:sp>
+      <p:sp>
+        <p:nvSpPr>
+          <p:cNvPr id="4" name="Slide Image Placeholder 3"/>
+          <p:cNvSpPr>
+            <a:spLocks noGrp="1" noRot="1" noChangeAspect="1"/>
+          </p:cNvSpPr>
+          <p:nvPr>
+            <p:ph type="sldImg" idx="2"/>
+          </p:nvPr>
+        </p:nvSpPr>
+        <p:spPr>
+          <a:xfrm>
+            <a:off x="2290763" y="512763"/>
+            <a:ext cx="4562475" cy="2566987"/>
+          </a:xfrm>
+          <a:prstGeom prst="rect">
+            <a:avLst/>
+          </a:prstGeom>
+          <a:noFill/>
+          <a:ln w="12700">
+            <a:solidFill>
+              <a:prstClr val="black"/>
+            </a:solidFill>
+          </a:ln>
+        </p:spPr>
+        <p:txBody>
+          <a:bodyPr vert="horz" lIns="91440" tIns="45720" rIns="91440" bIns="45720" rtlCol="0" anchor="ctr"/>
+          <a:lstStyle/>
+          <a:p>
+            <a:endParaRPr/>
+          </a:p>
+        </p:txBody>
+      </p:sp>
+      <p:sp>
+        <p:nvSpPr>
+          <p:cNvPr id="5" name="Notes Placeholder 4"/>
+          <p:cNvSpPr>
+            <a:spLocks noGrp="1"/>
+          </p:cNvSpPr>
+          <p:nvPr>
+            <p:ph type="body" sz="quarter" idx="3"/>
+          </p:nvPr>
+        </p:nvSpPr>
+        <p:spPr>
+          <a:xfrm>
+            <a:off x="914400" y="3251200"/>
+            <a:ext cx="7315200" cy="3081338"/>
+          </a:xfrm>
+          <a:prstGeom prst="rect">
+            <a:avLst/>
+          </a:prstGeom>
+        </p:spPr>
+        <p:txBody>
+          <a:bodyPr vert="horz" lIns="91440" tIns="45720" rIns="91440" bIns="45720" rtlCol="0"/>
+          <a:lstStyle/>
+          <a:p>
+            <a:endParaRPr lang="en-US" dirty="0"/>
+          </a:p>
+        </p:txBody>
+      </p:sp>
+      <p:sp>
+        <p:nvSpPr>
+          <p:cNvPr id="6" name="Footer Placeholder 5"/>
+          <p:cNvSpPr>
+            <a:spLocks noGrp="1"/>
+          </p:cNvSpPr>
+          <p:nvPr>
+            <p:ph type="ftr" sz="quarter" idx="4"/>
+          </p:nvPr>
+        </p:nvSpPr>
+        <p:spPr>
+          <a:xfrm>
+            <a:off x="0" y="6502400"/>
+            <a:ext cx="3962400" cy="341313"/>
+          </a:xfrm>
+          <a:prstGeom prst="rect">
+            <a:avLst/>
+          </a:prstGeom>
+        </p:spPr>
+        <p:txBody>
+          <a:bodyPr vert="horz" lIns="91440" tIns="45720" rIns="91440" bIns="45720" rtlCol="0" anchor="b"/>
+          <a:lstStyle>
+            <a:lvl1pPr algn="l">
+              <a:defRPr sz="1200"/>
+            </a:lvl1pPr>
+          </a:lstStyle>
+          <a:p>
+            <a:endParaRPr/>
+          </a:p>
+        </p:txBody>
+      </p:sp>
+      <p:sp>
+        <p:nvSpPr>
+          <p:cNvPr id="7" name="Slide Number Placeholder 6"/>
+          <p:cNvSpPr>
+            <a:spLocks noGrp="1"/>
+          </p:cNvSpPr>
+          <p:nvPr>
+            <p:ph type="sldNum" sz="quarter" idx="5"/>
+          </p:nvPr>
+        </p:nvSpPr>
+        <p:spPr>
+          <a:xfrm>
+            <a:off x="5180013" y="6502400"/>
+            <a:ext cx="3962400" cy="341313"/>
+          </a:xfrm>
+          <a:prstGeom prst="rect">
+            <a:avLst/>
+          </a:prstGeom>
+        </p:spPr>
+        <p:txBody>
+          <a:bodyPr vert="horz" lIns="91440" tIns="45720" rIns="91440" bIns="45720" rtlCol="0" anchor="b"/>
+          <a:lstStyle>
+            <a:lvl1pPr algn="r">
+              <a:defRPr sz="1200"/>
+            </a:lvl1pPr>
+          </a:lstStyle>
+          <a:p>
+            <a:r>
+              <a:rPr lang="cs-CZ"/>
+              <a:t>‹#›</a:t>
+            </a:r>
+          </a:p>
+        </p:txBody>
+      </p:sp>
+    </p:spTree>
+  </p:cSld>
+  <p:clrMapOvr>
+    <a:masterClrMapping/>
+  </p:clrMapOvr>
+</p:notes>
+</file>
+
+<file path=ppt/notesSlides/notesSlide2.xml><?xml version="1.0" encoding="utf-8"?>
+<p:notes xmlns:a="http://schemas.openxmlformats.org/drawingml/2006/main" xmlns:r="http://schemas.openxmlformats.org/officeDocument/2006/relationships" xmlns:p="http://schemas.openxmlformats.org/presentationml/2006/main">
+  <p:cSld>
+    <p:spTree>
+      <p:nvGrpSpPr>
+        <p:cNvPr id="1" name=""/>
+        <p:cNvGrpSpPr/>
+        <p:nvPr/>
+      </p:nvGrpSpPr>
+      <p:grpSpPr>
+        <a:xfrm>
+          <a:off x="0" y="0"/>
+          <a:ext cx="0" cy="0"/>
+          <a:chOff x="0" y="0"/>
+          <a:chExt cx="0" cy="0"/>
+        </a:xfrm>
+      </p:grpSpPr>
+      <p:sp>
+        <p:nvSpPr>
+          <p:cNvPr id="2" name="Header Placeholder 1"/>
+          <p:cNvSpPr>
+            <a:spLocks noGrp="1"/>
+          </p:cNvSpPr>
+          <p:nvPr>
+            <p:ph type="hdr" sz="quarter"/>
+          </p:nvPr>
+        </p:nvSpPr>
+        <p:spPr>
+          <a:xfrm>
+            <a:off x="0" y="0"/>
+            <a:ext cx="3962400" cy="342900"/>
+          </a:xfrm>
+          <a:prstGeom prst="rect">
+            <a:avLst/>
+          </a:prstGeom>
+        </p:spPr>
+        <p:txBody>
+          <a:bodyPr vert="horz" lIns="91440" tIns="45720" rIns="91440" bIns="45720" rtlCol="0"/>
+          <a:lstStyle>
+            <a:lvl1pPr algn="l">
+              <a:defRPr sz="1200"/>
+            </a:lvl1pPr>
+          </a:lstStyle>
+          <a:p>
+            <a:endParaRPr/>
+          </a:p>
+        </p:txBody>
+      </p:sp>
+      <p:sp>
+        <p:nvSpPr>
+          <p:cNvPr id="3" name="Date Placeholder 2"/>
+          <p:cNvSpPr>
+            <a:spLocks noGrp="1"/>
+          </p:cNvSpPr>
+          <p:nvPr>
+            <p:ph type="dt" idx="1"/>
+          </p:nvPr>
+        </p:nvSpPr>
+        <p:spPr>
+          <a:xfrm>
+            <a:off x="5180013" y="0"/>
+            <a:ext cx="3962400" cy="342900"/>
+          </a:xfrm>
+          <a:prstGeom prst="rect">
+            <a:avLst/>
+          </a:prstGeom>
+        </p:spPr>
+        <p:txBody>
+          <a:bodyPr vert="horz" lIns="91440" tIns="45720" rIns="91440" bIns="45720" rtlCol="0"/>
+          <a:lstStyle>
+            <a:lvl1pPr algn="r">
+              <a:defRPr sz="1200"/>
+            </a:lvl1pPr>
+          </a:lstStyle>
+          <a:p>
+            <a:r>
+              <a:rPr lang="cs-CZ"/>
+              <a:t>1.7.2013</a:t>
+            </a:r>
+          </a:p>
+        </p:txBody>
+      </p:sp>
+      <p:sp>
+        <p:nvSpPr>
+          <p:cNvPr id="4" name="Slide Image Placeholder 3"/>
+          <p:cNvSpPr>
+            <a:spLocks noGrp="1" noRot="1" noChangeAspect="1"/>
+          </p:cNvSpPr>
+          <p:nvPr>
+            <p:ph type="sldImg" idx="2"/>
+          </p:nvPr>
+        </p:nvSpPr>
+        <p:spPr>
+          <a:xfrm>
+            <a:off x="2290763" y="512763"/>
+            <a:ext cx="4562475" cy="2566987"/>
+          </a:xfrm>
+          <a:prstGeom prst="rect">
+            <a:avLst/>
+          </a:prstGeom>
+          <a:noFill/>
+          <a:ln w="12700">
+            <a:solidFill>
+              <a:prstClr val="black"/>
+            </a:solidFill>
+          </a:ln>
+        </p:spPr>
+        <p:txBody>
+          <a:bodyPr vert="horz" lIns="91440" tIns="45720" rIns="91440" bIns="45720" rtlCol="0" anchor="ctr"/>
+          <a:lstStyle/>
+          <a:p>
+            <a:endParaRPr/>
+          </a:p>
+        </p:txBody>
+      </p:sp>
+      <p:sp>
+        <p:nvSpPr>
+          <p:cNvPr id="5" name="Notes Placeholder 4"/>
+          <p:cNvSpPr>
+            <a:spLocks noGrp="1"/>
+          </p:cNvSpPr>
+          <p:nvPr>
+            <p:ph type="body" sz="quarter" idx="3"/>
+          </p:nvPr>
+        </p:nvSpPr>
+        <p:spPr>
+          <a:xfrm>
+            <a:off x="914400" y="3251200"/>
+            <a:ext cx="7315200" cy="3081338"/>
+          </a:xfrm>
+          <a:prstGeom prst="rect">
+            <a:avLst/>
+          </a:prstGeom>
+        </p:spPr>
+        <p:txBody>
+          <a:bodyPr vert="horz" lIns="91440" tIns="45720" rIns="91440" bIns="45720" rtlCol="0"/>
+          <a:lstStyle/>
+          <a:p>
+            <a:endParaRPr lang="en-US" dirty="0"/>
+          </a:p>
+        </p:txBody>
+      </p:sp>
+      <p:sp>
+        <p:nvSpPr>
+          <p:cNvPr id="6" name="Footer Placeholder 5"/>
+          <p:cNvSpPr>
+            <a:spLocks noGrp="1"/>
+          </p:cNvSpPr>
+          <p:nvPr>
+            <p:ph type="ftr" sz="quarter" idx="4"/>
+          </p:nvPr>
+        </p:nvSpPr>
+        <p:spPr>
+          <a:xfrm>
+            <a:off x="0" y="6502400"/>
+            <a:ext cx="3962400" cy="341313"/>
+          </a:xfrm>
+          <a:prstGeom prst="rect">
+            <a:avLst/>
+          </a:prstGeom>
+        </p:spPr>
+        <p:txBody>
+          <a:bodyPr vert="horz" lIns="91440" tIns="45720" rIns="91440" bIns="45720" rtlCol="0" anchor="b"/>
+          <a:lstStyle>
+            <a:lvl1pPr algn="l">
+              <a:defRPr sz="1200"/>
+            </a:lvl1pPr>
+          </a:lstStyle>
+          <a:p>
+            <a:endParaRPr/>
+          </a:p>
+        </p:txBody>
+      </p:sp>
+      <p:sp>
+        <p:nvSpPr>
+          <p:cNvPr id="7" name="Slide Number Placeholder 6"/>
+          <p:cNvSpPr>
+            <a:spLocks noGrp="1"/>
+          </p:cNvSpPr>
+          <p:nvPr>
+            <p:ph type="sldNum" sz="quarter" idx="5"/>
+          </p:nvPr>
+        </p:nvSpPr>
+        <p:spPr>
+          <a:xfrm>
+            <a:off x="5180013" y="6502400"/>
+            <a:ext cx="3962400" cy="341313"/>
+          </a:xfrm>
+          <a:prstGeom prst="rect">
+            <a:avLst/>
+          </a:prstGeom>
+        </p:spPr>
+        <p:txBody>
+          <a:bodyPr vert="horz" lIns="91440" tIns="45720" rIns="91440" bIns="45720" rtlCol="0" anchor="b"/>
+          <a:lstStyle>
+            <a:lvl1pPr algn="r">
+              <a:defRPr sz="1200"/>
+            </a:lvl1pPr>
+          </a:lstStyle>
+          <a:p>
+            <a:r>
+              <a:rPr lang="cs-CZ"/>
+              <a:t>‹#›</a:t>
+            </a:r>
+          </a:p>
+        </p:txBody>
+      </p:sp>
+    </p:spTree>
+  </p:cSld>
+  <p:clrMapOvr>
+    <a:masterClrMapping/>
+  </p:clrMapOvr>
+</p:notes>
+</file>
+
+<file path=ppt/notesSlides/notesSlide3.xml><?xml version="1.0" encoding="utf-8"?>
+<p:notes xmlns:a="http://schemas.openxmlformats.org/drawingml/2006/main" xmlns:r="http://schemas.openxmlformats.org/officeDocument/2006/relationships" xmlns:p="http://schemas.openxmlformats.org/presentationml/2006/main">
+  <p:cSld>
+    <p:spTree>
+      <p:nvGrpSpPr>
+        <p:cNvPr id="1" name=""/>
+        <p:cNvGrpSpPr/>
+        <p:nvPr/>
+      </p:nvGrpSpPr>
+      <p:grpSpPr>
+        <a:xfrm>
+          <a:off x="0" y="0"/>
+          <a:ext cx="0" cy="0"/>
+          <a:chOff x="0" y="0"/>
+          <a:chExt cx="0" cy="0"/>
+        </a:xfrm>
+      </p:grpSpPr>
+      <p:sp>
+        <p:nvSpPr>
+          <p:cNvPr id="2" name="Header Placeholder 1"/>
+          <p:cNvSpPr>
+            <a:spLocks noGrp="1"/>
+          </p:cNvSpPr>
+          <p:nvPr>
+            <p:ph type="hdr" sz="quarter"/>
+          </p:nvPr>
+        </p:nvSpPr>
+        <p:spPr>
+          <a:xfrm>
+            <a:off x="0" y="0"/>
+            <a:ext cx="3962400" cy="342900"/>
+          </a:xfrm>
+          <a:prstGeom prst="rect">
+            <a:avLst/>
+          </a:prstGeom>
+        </p:spPr>
+        <p:txBody>
+          <a:bodyPr vert="horz" lIns="91440" tIns="45720" rIns="91440" bIns="45720" rtlCol="0"/>
+          <a:lstStyle>
+            <a:lvl1pPr algn="l">
+              <a:defRPr sz="1200"/>
+            </a:lvl1pPr>
+          </a:lstStyle>
+          <a:p>
+            <a:endParaRPr/>
+          </a:p>
+        </p:txBody>
+      </p:sp>
+      <p:sp>
+        <p:nvSpPr>
+          <p:cNvPr id="3" name="Date Placeholder 2"/>
+          <p:cNvSpPr>
+            <a:spLocks noGrp="1"/>
+          </p:cNvSpPr>
+          <p:nvPr>
+            <p:ph type="dt" idx="1"/>
+          </p:nvPr>
+        </p:nvSpPr>
+        <p:spPr>
+          <a:xfrm>
+            <a:off x="5180013" y="0"/>
+            <a:ext cx="3962400" cy="342900"/>
+          </a:xfrm>
+          <a:prstGeom prst="rect">
+            <a:avLst/>
+          </a:prstGeom>
+        </p:spPr>
+        <p:txBody>
+          <a:bodyPr vert="horz" lIns="91440" tIns="45720" rIns="91440" bIns="45720" rtlCol="0"/>
+          <a:lstStyle>
+            <a:lvl1pPr algn="r">
+              <a:defRPr sz="1200"/>
+            </a:lvl1pPr>
+          </a:lstStyle>
+          <a:p>
+            <a:r>
+              <a:rPr lang="cs-CZ"/>
+              <a:t>1.7.2013</a:t>
+            </a:r>
+          </a:p>
+        </p:txBody>
+      </p:sp>
+      <p:sp>
+        <p:nvSpPr>
+          <p:cNvPr id="4" name="Slide Image Placeholder 3"/>
+          <p:cNvSpPr>
+            <a:spLocks noGrp="1" noRot="1" noChangeAspect="1"/>
+          </p:cNvSpPr>
+          <p:nvPr>
+            <p:ph type="sldImg" idx="2"/>
+          </p:nvPr>
+        </p:nvSpPr>
+        <p:spPr>
+          <a:xfrm>
+            <a:off x="2290763" y="512763"/>
+            <a:ext cx="4562475" cy="2566987"/>
+          </a:xfrm>
+          <a:prstGeom prst="rect">
+            <a:avLst/>
+          </a:prstGeom>
+          <a:noFill/>
+          <a:ln w="12700">
+            <a:solidFill>
+              <a:prstClr val="black"/>
+            </a:solidFill>
+          </a:ln>
+        </p:spPr>
+        <p:txBody>
+          <a:bodyPr vert="horz" lIns="91440" tIns="45720" rIns="91440" bIns="45720" rtlCol="0" anchor="ctr"/>
+          <a:lstStyle/>
+          <a:p>
+            <a:endParaRPr/>
+          </a:p>
+        </p:txBody>
+      </p:sp>
+      <p:sp>
+        <p:nvSpPr>
+          <p:cNvPr id="5" name="Notes Placeholder 4"/>
+          <p:cNvSpPr>
+            <a:spLocks noGrp="1"/>
+          </p:cNvSpPr>
+          <p:nvPr>
+            <p:ph type="body" sz="quarter" idx="3"/>
+          </p:nvPr>
+        </p:nvSpPr>
+        <p:spPr>
+          <a:xfrm>
+            <a:off x="914400" y="3251200"/>
+            <a:ext cx="7315200" cy="3081338"/>
+          </a:xfrm>
+          <a:prstGeom prst="rect">
+            <a:avLst/>
+          </a:prstGeom>
+        </p:spPr>
+        <p:txBody>
+          <a:bodyPr vert="horz" lIns="91440" tIns="45720" rIns="91440" bIns="45720" rtlCol="0"/>
+          <a:lstStyle/>
+          <a:p>
+            <a:endParaRPr lang="en-US" dirty="0"/>
+          </a:p>
+        </p:txBody>
+      </p:sp>
+      <p:sp>
+        <p:nvSpPr>
+          <p:cNvPr id="6" name="Footer Placeholder 5"/>
+          <p:cNvSpPr>
+            <a:spLocks noGrp="1"/>
+          </p:cNvSpPr>
+          <p:nvPr>
+            <p:ph type="ftr" sz="quarter" idx="4"/>
+          </p:nvPr>
+        </p:nvSpPr>
+        <p:spPr>
+          <a:xfrm>
+            <a:off x="0" y="6502400"/>
+            <a:ext cx="3962400" cy="341313"/>
+          </a:xfrm>
+          <a:prstGeom prst="rect">
+            <a:avLst/>
+          </a:prstGeom>
+        </p:spPr>
+        <p:txBody>
+          <a:bodyPr vert="horz" lIns="91440" tIns="45720" rIns="91440" bIns="45720" rtlCol="0" anchor="b"/>
+          <a:lstStyle>
+            <a:lvl1pPr algn="l">
+              <a:defRPr sz="1200"/>
+            </a:lvl1pPr>
+          </a:lstStyle>
+          <a:p>
+            <a:endParaRPr/>
+          </a:p>
+        </p:txBody>
+      </p:sp>
+      <p:sp>
+        <p:nvSpPr>
+          <p:cNvPr id="7" name="Slide Number Placeholder 6"/>
+          <p:cNvSpPr>
+            <a:spLocks noGrp="1"/>
+          </p:cNvSpPr>
+          <p:nvPr>
+            <p:ph type="sldNum" sz="quarter" idx="5"/>
+          </p:nvPr>
+        </p:nvSpPr>
+        <p:spPr>
+          <a:xfrm>
+            <a:off x="5180013" y="6502400"/>
+            <a:ext cx="3962400" cy="341313"/>
+          </a:xfrm>
+          <a:prstGeom prst="rect">
+            <a:avLst/>
+          </a:prstGeom>
+        </p:spPr>
+        <p:txBody>
+          <a:bodyPr vert="horz" lIns="91440" tIns="45720" rIns="91440" bIns="45720" rtlCol="0" anchor="b"/>
+          <a:lstStyle>
+            <a:lvl1pPr algn="r">
+              <a:defRPr sz="1200"/>
+            </a:lvl1pPr>
+          </a:lstStyle>
+          <a:p>
+            <a:r>
+              <a:rPr lang="cs-CZ"/>
+              <a:t>‹#›</a:t>
+            </a:r>
+          </a:p>
+        </p:txBody>
+      </p:sp>
+    </p:spTree>
+  </p:cSld>
+  <p:clrMapOvr>
+    <a:masterClrMapping/>
+  </p:clrMapOvr>
+</p:notes>
+</file>
+
+<file path=ppt/notesSlides/notesSlide4.xml><?xml version="1.0" encoding="utf-8"?>
+<p:notes xmlns:a="http://schemas.openxmlformats.org/drawingml/2006/main" xmlns:r="http://schemas.openxmlformats.org/officeDocument/2006/relationships" xmlns:p="http://schemas.openxmlformats.org/presentationml/2006/main">
+  <p:cSld>
+    <p:spTree>
+      <p:nvGrpSpPr>
+        <p:cNvPr id="1" name=""/>
+        <p:cNvGrpSpPr/>
+        <p:nvPr/>
+      </p:nvGrpSpPr>
+      <p:grpSpPr>
+        <a:xfrm>
+          <a:off x="0" y="0"/>
+          <a:ext cx="0" cy="0"/>
+          <a:chOff x="0" y="0"/>
+          <a:chExt cx="0" cy="0"/>
+        </a:xfrm>
+      </p:grpSpPr>
+      <p:sp>
+        <p:nvSpPr>
+          <p:cNvPr id="2" name="Header Placeholder 1"/>
+          <p:cNvSpPr>
+            <a:spLocks noGrp="1"/>
+          </p:cNvSpPr>
+          <p:nvPr>
+            <p:ph type="hdr" sz="quarter"/>
+          </p:nvPr>
+        </p:nvSpPr>
+        <p:spPr>
+          <a:xfrm>
+            <a:off x="0" y="0"/>
+            <a:ext cx="3962400" cy="342900"/>
+          </a:xfrm>
+          <a:prstGeom prst="rect">
+            <a:avLst/>
+          </a:prstGeom>
+        </p:spPr>
+        <p:txBody>
+          <a:bodyPr vert="horz" lIns="91440" tIns="45720" rIns="91440" bIns="45720" rtlCol="0"/>
+          <a:lstStyle>
+            <a:lvl1pPr algn="l">
+              <a:defRPr sz="1200"/>
+            </a:lvl1pPr>
+          </a:lstStyle>
+          <a:p>
+            <a:endParaRPr/>
+          </a:p>
+        </p:txBody>
+      </p:sp>
+      <p:sp>
+        <p:nvSpPr>
+          <p:cNvPr id="3" name="Date Placeholder 2"/>
+          <p:cNvSpPr>
+            <a:spLocks noGrp="1"/>
+          </p:cNvSpPr>
+          <p:nvPr>
+            <p:ph type="dt" idx="1"/>
+          </p:nvPr>
+        </p:nvSpPr>
+        <p:spPr>
+          <a:xfrm>
+            <a:off x="5180013" y="0"/>
+            <a:ext cx="3962400" cy="342900"/>
+          </a:xfrm>
+          <a:prstGeom prst="rect">
+            <a:avLst/>
+          </a:prstGeom>
+        </p:spPr>
+        <p:txBody>
+          <a:bodyPr vert="horz" lIns="91440" tIns="45720" rIns="91440" bIns="45720" rtlCol="0"/>
+          <a:lstStyle>
+            <a:lvl1pPr algn="r">
+              <a:defRPr sz="1200"/>
+            </a:lvl1pPr>
+          </a:lstStyle>
+          <a:p>
+            <a:r>
+              <a:rPr lang="cs-CZ"/>
+              <a:t>1.7.2013</a:t>
+            </a:r>
+          </a:p>
+        </p:txBody>
+      </p:sp>
+      <p:sp>
+        <p:nvSpPr>
+          <p:cNvPr id="4" name="Slide Image Placeholder 3"/>
+          <p:cNvSpPr>
+            <a:spLocks noGrp="1" noRot="1" noChangeAspect="1"/>
+          </p:cNvSpPr>
+          <p:nvPr>
+            <p:ph type="sldImg" idx="2"/>
+          </p:nvPr>
+        </p:nvSpPr>
+        <p:spPr>
+          <a:xfrm>
+            <a:off x="2290763" y="512763"/>
+            <a:ext cx="4562475" cy="2566987"/>
+          </a:xfrm>
+          <a:prstGeom prst="rect">
+            <a:avLst/>
+          </a:prstGeom>
+          <a:noFill/>
+          <a:ln w="12700">
+            <a:solidFill>
+              <a:prstClr val="black"/>
+            </a:solidFill>
+          </a:ln>
+        </p:spPr>
+        <p:txBody>
+          <a:bodyPr vert="horz" lIns="91440" tIns="45720" rIns="91440" bIns="45720" rtlCol="0" anchor="ctr"/>
+          <a:lstStyle/>
+          <a:p>
+            <a:endParaRPr/>
+          </a:p>
+        </p:txBody>
+      </p:sp>
+      <p:sp>
+        <p:nvSpPr>
+          <p:cNvPr id="5" name="Notes Placeholder 4"/>
+          <p:cNvSpPr>
+            <a:spLocks noGrp="1"/>
+          </p:cNvSpPr>
+          <p:nvPr>
+            <p:ph type="body" sz="quarter" idx="3"/>
+          </p:nvPr>
+        </p:nvSpPr>
+        <p:spPr>
+          <a:xfrm>
+            <a:off x="914400" y="3251200"/>
+            <a:ext cx="7315200" cy="3081338"/>
+          </a:xfrm>
+          <a:prstGeom prst="rect">
+            <a:avLst/>
+          </a:prstGeom>
+        </p:spPr>
+        <p:txBody>
+          <a:bodyPr vert="horz" lIns="91440" tIns="45720" rIns="91440" bIns="45720" rtlCol="0"/>
+          <a:lstStyle/>
+          <a:p>
+            <a:endParaRPr lang="en-US" dirty="0"/>
+          </a:p>
+        </p:txBody>
+      </p:sp>
+      <p:sp>
+        <p:nvSpPr>
+          <p:cNvPr id="6" name="Footer Placeholder 5"/>
+          <p:cNvSpPr>
+            <a:spLocks noGrp="1"/>
+          </p:cNvSpPr>
+          <p:nvPr>
+            <p:ph type="ftr" sz="quarter" idx="4"/>
+          </p:nvPr>
+        </p:nvSpPr>
+        <p:spPr>
+          <a:xfrm>
+            <a:off x="0" y="6502400"/>
+            <a:ext cx="3962400" cy="341313"/>
+          </a:xfrm>
+          <a:prstGeom prst="rect">
+            <a:avLst/>
+          </a:prstGeom>
+        </p:spPr>
+        <p:txBody>
+          <a:bodyPr vert="horz" lIns="91440" tIns="45720" rIns="91440" bIns="45720" rtlCol="0" anchor="b"/>
+          <a:lstStyle>
+            <a:lvl1pPr algn="l">
+              <a:defRPr sz="1200"/>
+            </a:lvl1pPr>
+          </a:lstStyle>
+          <a:p>
+            <a:endParaRPr/>
+          </a:p>
+        </p:txBody>
+      </p:sp>
+      <p:sp>
+        <p:nvSpPr>
+          <p:cNvPr id="7" name="Slide Number Placeholder 6"/>
+          <p:cNvSpPr>
+            <a:spLocks noGrp="1"/>
+          </p:cNvSpPr>
+          <p:nvPr>
+            <p:ph type="sldNum" sz="quarter" idx="5"/>
+          </p:nvPr>
+        </p:nvSpPr>
+        <p:spPr>
+          <a:xfrm>
+            <a:off x="5180013" y="6502400"/>
+            <a:ext cx="3962400" cy="341313"/>
+          </a:xfrm>
+          <a:prstGeom prst="rect">
+            <a:avLst/>
+          </a:prstGeom>
+        </p:spPr>
+        <p:txBody>
+          <a:bodyPr vert="horz" lIns="91440" tIns="45720" rIns="91440" bIns="45720" rtlCol="0" anchor="b"/>
+          <a:lstStyle>
+            <a:lvl1pPr algn="r">
+              <a:defRPr sz="1200"/>
+            </a:lvl1pPr>
+          </a:lstStyle>
+          <a:p>
+            <a:r>
+              <a:rPr lang="cs-CZ"/>
+              <a:t>‹#›</a:t>
+            </a:r>
+          </a:p>
+        </p:txBody>
+      </p:sp>
+    </p:spTree>
+  </p:cSld>
+  <p:clrMapOvr>
+    <a:masterClrMapping/>
+  </p:clrMapOvr>
+</p:notes>
+</file>
+
+<file path=ppt/notesSlides/notesSlide5.xml><?xml version="1.0" encoding="utf-8"?>
+<p:notes xmlns:a="http://schemas.openxmlformats.org/drawingml/2006/main" xmlns:r="http://schemas.openxmlformats.org/officeDocument/2006/relationships" xmlns:p="http://schemas.openxmlformats.org/presentationml/2006/main">
+  <p:cSld>
+    <p:spTree>
+      <p:nvGrpSpPr>
+        <p:cNvPr id="1" name=""/>
+        <p:cNvGrpSpPr/>
+        <p:nvPr/>
+      </p:nvGrpSpPr>
+      <p:grpSpPr>
+        <a:xfrm>
+          <a:off x="0" y="0"/>
+          <a:ext cx="0" cy="0"/>
+          <a:chOff x="0" y="0"/>
+          <a:chExt cx="0" cy="0"/>
+        </a:xfrm>
+      </p:grpSpPr>
+      <p:sp>
+        <p:nvSpPr>
+          <p:cNvPr id="2" name="Header Placeholder 1"/>
+          <p:cNvSpPr>
+            <a:spLocks noGrp="1"/>
+          </p:cNvSpPr>
+          <p:nvPr>
+            <p:ph type="hdr" sz="quarter"/>
+          </p:nvPr>
+        </p:nvSpPr>
+        <p:spPr>
+          <a:xfrm>
+            <a:off x="0" y="0"/>
+            <a:ext cx="3962400" cy="342900"/>
+          </a:xfrm>
+          <a:prstGeom prst="rect">
+            <a:avLst/>
+          </a:prstGeom>
+        </p:spPr>
+        <p:txBody>
+          <a:bodyPr vert="horz" lIns="91440" tIns="45720" rIns="91440" bIns="45720" rtlCol="0"/>
+          <a:lstStyle>
+            <a:lvl1pPr algn="l">
+              <a:defRPr sz="1200"/>
+            </a:lvl1pPr>
+          </a:lstStyle>
+          <a:p>
+            <a:endParaRPr/>
+          </a:p>
+        </p:txBody>
+      </p:sp>
+      <p:sp>
+        <p:nvSpPr>
+          <p:cNvPr id="3" name="Date Placeholder 2"/>
+          <p:cNvSpPr>
+            <a:spLocks noGrp="1"/>
+          </p:cNvSpPr>
+          <p:nvPr>
+            <p:ph type="dt" idx="1"/>
+          </p:nvPr>
+        </p:nvSpPr>
+        <p:spPr>
+          <a:xfrm>
+            <a:off x="5180013" y="0"/>
+            <a:ext cx="3962400" cy="342900"/>
+          </a:xfrm>
+          <a:prstGeom prst="rect">
+            <a:avLst/>
+          </a:prstGeom>
+        </p:spPr>
+        <p:txBody>
+          <a:bodyPr vert="horz" lIns="91440" tIns="45720" rIns="91440" bIns="45720" rtlCol="0"/>
+          <a:lstStyle>
+            <a:lvl1pPr algn="r">
+              <a:defRPr sz="1200"/>
+            </a:lvl1pPr>
+          </a:lstStyle>
+          <a:p>
+            <a:r>
+              <a:rPr lang="cs-CZ"/>
+              <a:t>1.7.2013</a:t>
+            </a:r>
+          </a:p>
+        </p:txBody>
+      </p:sp>
+      <p:sp>
+        <p:nvSpPr>
+          <p:cNvPr id="4" name="Slide Image Placeholder 3"/>
+          <p:cNvSpPr>
+            <a:spLocks noGrp="1" noRot="1" noChangeAspect="1"/>
+          </p:cNvSpPr>
+          <p:nvPr>
+            <p:ph type="sldImg" idx="2"/>
+          </p:nvPr>
+        </p:nvSpPr>
+        <p:spPr>
+          <a:xfrm>
+            <a:off x="2290763" y="512763"/>
+            <a:ext cx="4562475" cy="2566987"/>
+          </a:xfrm>
+          <a:prstGeom prst="rect">
+            <a:avLst/>
+          </a:prstGeom>
+          <a:noFill/>
+          <a:ln w="12700">
+            <a:solidFill>
+              <a:prstClr val="black"/>
+            </a:solidFill>
+          </a:ln>
+        </p:spPr>
+        <p:txBody>
+          <a:bodyPr vert="horz" lIns="91440" tIns="45720" rIns="91440" bIns="45720" rtlCol="0" anchor="ctr"/>
+          <a:lstStyle/>
+          <a:p>
+            <a:endParaRPr/>
+          </a:p>
+        </p:txBody>
+      </p:sp>
+      <p:sp>
+        <p:nvSpPr>
+          <p:cNvPr id="5" name="Notes Placeholder 4"/>
+          <p:cNvSpPr>
+            <a:spLocks noGrp="1"/>
+          </p:cNvSpPr>
+          <p:nvPr>
+            <p:ph type="body" sz="quarter" idx="3"/>
+          </p:nvPr>
+        </p:nvSpPr>
+        <p:spPr>
+          <a:xfrm>
+            <a:off x="914400" y="3251200"/>
+            <a:ext cx="7315200" cy="3081338"/>
+          </a:xfrm>
+          <a:prstGeom prst="rect">
+            <a:avLst/>
+          </a:prstGeom>
+        </p:spPr>
+        <p:txBody>
+          <a:bodyPr vert="horz" lIns="91440" tIns="45720" rIns="91440" bIns="45720" rtlCol="0"/>
+          <a:lstStyle/>
+          <a:p>
+            <a:endParaRPr lang="en-US" dirty="0"/>
+          </a:p>
+        </p:txBody>
+      </p:sp>
+      <p:sp>
+        <p:nvSpPr>
+          <p:cNvPr id="6" name="Footer Placeholder 5"/>
+          <p:cNvSpPr>
+            <a:spLocks noGrp="1"/>
+          </p:cNvSpPr>
+          <p:nvPr>
+            <p:ph type="ftr" sz="quarter" idx="4"/>
+          </p:nvPr>
+        </p:nvSpPr>
+        <p:spPr>
+          <a:xfrm>
+            <a:off x="0" y="6502400"/>
+            <a:ext cx="3962400" cy="341313"/>
+          </a:xfrm>
+          <a:prstGeom prst="rect">
+            <a:avLst/>
+          </a:prstGeom>
+        </p:spPr>
+        <p:txBody>
+          <a:bodyPr vert="horz" lIns="91440" tIns="45720" rIns="91440" bIns="45720" rtlCol="0" anchor="b"/>
+          <a:lstStyle>
+            <a:lvl1pPr algn="l">
+              <a:defRPr sz="1200"/>
+            </a:lvl1pPr>
+          </a:lstStyle>
+          <a:p>
+            <a:endParaRPr/>
+          </a:p>
+        </p:txBody>
+      </p:sp>
+      <p:sp>
+        <p:nvSpPr>
+          <p:cNvPr id="7" name="Slide Number Placeholder 6"/>
+          <p:cNvSpPr>
+            <a:spLocks noGrp="1"/>
+          </p:cNvSpPr>
+          <p:nvPr>
+            <p:ph type="sldNum" sz="quarter" idx="5"/>
+          </p:nvPr>
+        </p:nvSpPr>
+        <p:spPr>
+          <a:xfrm>
+            <a:off x="5180013" y="6502400"/>
+            <a:ext cx="3962400" cy="341313"/>
+          </a:xfrm>
+          <a:prstGeom prst="rect">
+            <a:avLst/>
+          </a:prstGeom>
+        </p:spPr>
+        <p:txBody>
+          <a:bodyPr vert="horz" lIns="91440" tIns="45720" rIns="91440" bIns="45720" rtlCol="0" anchor="b"/>
+          <a:lstStyle>
+            <a:lvl1pPr algn="r">
+              <a:defRPr sz="1200"/>
+            </a:lvl1pPr>
+          </a:lstStyle>
+          <a:p>
+            <a:r>
+              <a:rPr lang="cs-CZ"/>
+              <a:t>‹#›</a:t>
+            </a:r>
+          </a:p>
+        </p:txBody>
+      </p:sp>
+    </p:spTree>
+  </p:cSld>
+  <p:clrMapOvr>
+    <a:masterClrMapping/>
+  </p:clrMapOvr>
+</p:notes>
+</file>
+
 <file path=ppt/slideLayouts/slideLayout1.xml><?xml version="1.0" encoding="utf-8"?>
 <p:sldLayout xmlns:a="http://schemas.openxmlformats.org/drawingml/2006/main" xmlns:r="http://schemas.openxmlformats.org/officeDocument/2006/relationships" xmlns:p="http://schemas.openxmlformats.org/presentationml/2006/main" type="title" preserve="1">
   <p:cSld name="Title Slide">
@@ -356,7 +1784,7 @@
             <a:fld id="{1D8BD707-D9CF-40AE-B4C6-C98DA3205C09}" type="datetimeFigureOut">
               <a:rPr lang="en-US" smtClean="0"/>
               <a:pPr/>
-              <a:t>10/2/2026</a:t>
+              <a:t>10/3/2026</a:t>
             </a:fld>
             <a:endParaRPr lang="en-US"/>
           </a:p>
@@ -521,7 +1949,7 @@
             <a:fld id="{1D8BD707-D9CF-40AE-B4C6-C98DA3205C09}" type="datetimeFigureOut">
               <a:rPr lang="en-US" smtClean="0"/>
               <a:pPr/>
-              <a:t>10/2/2026</a:t>
+              <a:t>10/3/2026</a:t>
             </a:fld>
             <a:endParaRPr lang="en-US"/>
           </a:p>
@@ -696,7 +2124,7 @@
             <a:fld id="{1D8BD707-D9CF-40AE-B4C6-C98DA3205C09}" type="datetimeFigureOut">
               <a:rPr lang="en-US" smtClean="0"/>
               <a:pPr/>
-              <a:t>10/2/2026</a:t>
+              <a:t>10/3/2026</a:t>
             </a:fld>
             <a:endParaRPr lang="en-US"/>
           </a:p>
@@ -861,7 +2289,7 @@
             <a:fld id="{1D8BD707-D9CF-40AE-B4C6-C98DA3205C09}" type="datetimeFigureOut">
               <a:rPr lang="en-US" smtClean="0"/>
               <a:pPr/>
-              <a:t>10/2/2026</a:t>
+              <a:t>10/3/2026</a:t>
             </a:fld>
             <a:endParaRPr lang="en-US"/>
           </a:p>
@@ -1103,7 +2531,7 @@
             <a:fld id="{1D8BD707-D9CF-40AE-B4C6-C98DA3205C09}" type="datetimeFigureOut">
               <a:rPr lang="en-US" smtClean="0"/>
               <a:pPr/>
-              <a:t>10/2/2026</a:t>
+              <a:t>10/3/2026</a:t>
             </a:fld>
             <a:endParaRPr lang="en-US"/>
           </a:p>
@@ -1385,7 +2813,7 @@
             <a:fld id="{1D8BD707-D9CF-40AE-B4C6-C98DA3205C09}" type="datetimeFigureOut">
               <a:rPr lang="en-US" smtClean="0"/>
               <a:pPr/>
-              <a:t>10/2/2026</a:t>
+              <a:t>10/3/2026</a:t>
             </a:fld>
             <a:endParaRPr lang="en-US"/>
           </a:p>
@@ -1801,7 +3229,7 @@
             <a:fld id="{1D8BD707-D9CF-40AE-B4C6-C98DA3205C09}" type="datetimeFigureOut">
               <a:rPr lang="en-US" smtClean="0"/>
               <a:pPr/>
-              <a:t>10/2/2026</a:t>
+              <a:t>10/3/2026</a:t>
             </a:fld>
             <a:endParaRPr lang="en-US"/>
           </a:p>
@@ -1915,7 +3343,7 @@
             <a:fld id="{1D8BD707-D9CF-40AE-B4C6-C98DA3205C09}" type="datetimeFigureOut">
               <a:rPr lang="en-US" smtClean="0"/>
               <a:pPr/>
-              <a:t>10/2/2026</a:t>
+              <a:t>10/3/2026</a:t>
             </a:fld>
             <a:endParaRPr lang="en-US"/>
           </a:p>
@@ -2007,7 +3435,7 @@
             <a:fld id="{1D8BD707-D9CF-40AE-B4C6-C98DA3205C09}" type="datetimeFigureOut">
               <a:rPr lang="en-US" smtClean="0"/>
               <a:pPr/>
-              <a:t>10/2/2026</a:t>
+              <a:t>10/3/2026</a:t>
             </a:fld>
             <a:endParaRPr lang="en-US"/>
           </a:p>
@@ -2279,7 +3707,7 @@
             <a:fld id="{1D8BD707-D9CF-40AE-B4C6-C98DA3205C09}" type="datetimeFigureOut">
               <a:rPr lang="en-US" smtClean="0"/>
               <a:pPr/>
-              <a:t>10/2/2026</a:t>
+              <a:t>10/3/2026</a:t>
             </a:fld>
             <a:endParaRPr lang="en-US"/>
           </a:p>
@@ -2528,7 +3956,7 @@
             <a:fld id="{1D8BD707-D9CF-40AE-B4C6-C98DA3205C09}" type="datetimeFigureOut">
               <a:rPr lang="en-US" smtClean="0"/>
               <a:pPr/>
-              <a:t>10/2/2026</a:t>
+              <a:t>10/3/2026</a:t>
             </a:fld>
             <a:endParaRPr lang="en-US"/>
           </a:p>
@@ -2736,7 +4164,7 @@
             <a:fld id="{1D8BD707-D9CF-40AE-B4C6-C98DA3205C09}" type="datetimeFigureOut">
               <a:rPr lang="en-US" smtClean="0"/>
               <a:pPr/>
-              <a:t>10/2/2026</a:t>
+              <a:t>10/3/2026</a:t>
             </a:fld>
             <a:endParaRPr lang="en-US"/>
           </a:p>
@@ -6425,7 +7853,7 @@
               </a:pathLst>
             </a:custGeom>
             <a:blipFill>
-              <a:blip r:embed="rId2"/>
+              <a:blip r:embed="rId3"/>
               <a:stretch>
                 <a:fillRect t="-27" b="-25"/>
               </a:stretch>
@@ -6493,7 +7921,7 @@
               </a:pathLst>
             </a:custGeom>
             <a:blipFill>
-              <a:blip r:embed="rId3"/>
+              <a:blip r:embed="rId4"/>
               <a:stretch>
                 <a:fillRect t="-30" b="-30"/>
               </a:stretch>
@@ -6757,7 +8185,7 @@
               </a:pathLst>
             </a:custGeom>
             <a:blipFill>
-              <a:blip r:embed="rId4"/>
+              <a:blip r:embed="rId5"/>
               <a:stretch>
                 <a:fillRect l="-235" r="-235"/>
               </a:stretch>
@@ -6825,7 +8253,7 @@
               </a:pathLst>
             </a:custGeom>
             <a:blipFill>
-              <a:blip r:embed="rId5"/>
+              <a:blip r:embed="rId6"/>
               <a:stretch>
                 <a:fillRect t="-6" b="-6"/>
               </a:stretch>
@@ -7021,7 +8449,7 @@
               </a:pathLst>
             </a:custGeom>
             <a:blipFill>
-              <a:blip r:embed="rId2"/>
+              <a:blip r:embed="rId3"/>
               <a:stretch>
                 <a:fillRect t="-27" b="-25"/>
               </a:stretch>
@@ -7089,7 +8517,7 @@
               </a:pathLst>
             </a:custGeom>
             <a:blipFill>
-              <a:blip r:embed="rId3"/>
+              <a:blip r:embed="rId4"/>
               <a:stretch>
                 <a:fillRect t="-30" b="-30"/>
               </a:stretch>
@@ -7271,7 +8699,7 @@
               </a:pathLst>
             </a:custGeom>
             <a:blipFill>
-              <a:blip r:embed="rId4"/>
+              <a:blip r:embed="rId5"/>
               <a:stretch>
                 <a:fillRect l="-23" r="-24"/>
               </a:stretch>
@@ -8096,7 +9524,7 @@
               </a:pathLst>
             </a:custGeom>
             <a:blipFill>
-              <a:blip r:embed="rId2"/>
+              <a:blip r:embed="rId3"/>
               <a:stretch>
                 <a:fillRect t="-138" b="-136"/>
               </a:stretch>
@@ -8164,7 +9592,7 @@
               </a:pathLst>
             </a:custGeom>
             <a:blipFill>
-              <a:blip r:embed="rId3"/>
+              <a:blip r:embed="rId4"/>
               <a:stretch>
                 <a:fillRect l="-67" r="-67"/>
               </a:stretch>
@@ -8557,7 +9985,7 @@
               </a:pathLst>
             </a:custGeom>
             <a:blipFill>
-              <a:blip r:embed="rId4"/>
+              <a:blip r:embed="rId5"/>
               <a:stretch>
                 <a:fillRect/>
               </a:stretch>
@@ -10639,7 +12067,7 @@
               </a:pathLst>
             </a:custGeom>
             <a:blipFill>
-              <a:blip r:embed="rId2"/>
+              <a:blip r:embed="rId3"/>
               <a:stretch>
                 <a:fillRect t="-138" b="-136"/>
               </a:stretch>
@@ -10707,7 +12135,7 @@
               </a:pathLst>
             </a:custGeom>
             <a:blipFill>
-              <a:blip r:embed="rId3"/>
+              <a:blip r:embed="rId4"/>
               <a:stretch>
                 <a:fillRect l="-67" r="-67"/>
               </a:stretch>
@@ -11549,7 +12977,7 @@
               </a:pathLst>
             </a:custGeom>
             <a:blipFill>
-              <a:blip r:embed="rId2"/>
+              <a:blip r:embed="rId3"/>
               <a:stretch>
                 <a:fillRect t="-138" b="-136"/>
               </a:stretch>
@@ -11617,7 +13045,7 @@
               </a:pathLst>
             </a:custGeom>
             <a:blipFill>
-              <a:blip r:embed="rId3"/>
+              <a:blip r:embed="rId4"/>
               <a:stretch>
                 <a:fillRect l="-67" r="-67"/>
               </a:stretch>
@@ -12135,7 +13563,7 @@
         <p:spPr>
           <a:xfrm>
             <a:off x="1521543" y="5209165"/>
-            <a:ext cx="13986596" cy="800100"/>
+            <a:ext cx="13986596" cy="781152"/>
           </a:xfrm>
           <a:prstGeom prst="rect">
             <a:avLst/>
@@ -12153,7 +13581,7 @@
               </a:lnSpc>
             </a:pPr>
             <a:r>
-              <a:rPr lang="en-US" sz="1749" b="1" dirty="0">
+              <a:rPr lang="en-US" sz="1749" b="1">
                 <a:solidFill>
                   <a:srgbClr val="33294B"/>
                 </a:solidFill>
@@ -12172,7 +13600,7 @@
               </a:lnSpc>
             </a:pPr>
             <a:r>
-              <a:rPr lang="en-US" sz="1749" dirty="0">
+              <a:rPr lang="en-US" sz="1749">
                 <a:solidFill>
                   <a:srgbClr val="33294B"/>
                 </a:solidFill>
@@ -12181,55 +13609,7 @@
                 <a:cs typeface="Poppins"/>
                 <a:sym typeface="Poppins"/>
               </a:rPr>
-              <a:t> The pipeline logs every ingest run to </a:t>
-            </a:r>
-            <a:r>
-              <a:rPr lang="en-US" sz="1749" dirty="0" err="1">
-                <a:solidFill>
-                  <a:srgbClr val="33294B"/>
-                </a:solidFill>
-                <a:latin typeface="Poppins"/>
-                <a:ea typeface="Poppins"/>
-                <a:cs typeface="Poppins"/>
-                <a:sym typeface="Poppins"/>
-              </a:rPr>
-              <a:t>manifest.json</a:t>
-            </a:r>
-            <a:r>
-              <a:rPr lang="en-US" sz="1749" dirty="0">
-                <a:solidFill>
-                  <a:srgbClr val="33294B"/>
-                </a:solidFill>
-                <a:latin typeface="Poppins"/>
-                <a:ea typeface="Poppins"/>
-                <a:cs typeface="Poppins"/>
-                <a:sym typeface="Poppins"/>
-              </a:rPr>
-              <a:t> for full traceability. Provisional months are excluded from the </a:t>
-            </a:r>
-            <a:r>
-              <a:rPr lang="en-US" sz="1749" dirty="0" err="1">
-                <a:solidFill>
-                  <a:srgbClr val="33294B"/>
-                </a:solidFill>
-                <a:latin typeface="Poppins"/>
-                <a:ea typeface="Poppins"/>
-                <a:cs typeface="Poppins"/>
-                <a:sym typeface="Poppins"/>
-              </a:rPr>
-              <a:t>backtest</a:t>
-            </a:r>
-            <a:r>
-              <a:rPr lang="en-US" sz="1749" dirty="0">
-                <a:solidFill>
-                  <a:srgbClr val="33294B"/>
-                </a:solidFill>
-                <a:latin typeface="Poppins"/>
-                <a:ea typeface="Poppins"/>
-                <a:cs typeface="Poppins"/>
-                <a:sym typeface="Poppins"/>
-              </a:rPr>
-              <a:t> evaluation to prevent misleading accuracy claims.</a:t>
+              <a:t> The pipeline logs every ingest run to manifest.json for full traceability. Provisional months are excluded from the backtest evaluation to prevent misleading accuracy claims.</a:t>
             </a:r>
           </a:p>
         </p:txBody>
@@ -18042,7 +19422,7 @@
             <a:bodyPr/>
             <a:lstStyle/>
             <a:p>
-              <a:endParaRPr lang="en-US" dirty="0"/>
+              <a:endParaRPr lang="en-US"/>
             </a:p>
           </p:txBody>
         </p:sp>
@@ -19886,7 +21266,7 @@
         <p:spPr>
           <a:xfrm>
             <a:off x="1591437" y="7707620"/>
-            <a:ext cx="14542591" cy="410369"/>
+            <a:ext cx="14584462" cy="219075"/>
           </a:xfrm>
           <a:prstGeom prst="rect">
             <a:avLst/>
@@ -19904,7 +21284,7 @@
               </a:lnSpc>
             </a:pPr>
             <a:r>
-              <a:rPr lang="en-US" sz="1350" dirty="0">
+              <a:rPr lang="en-US" sz="1350">
                 <a:solidFill>
                   <a:srgbClr val="33294B"/>
                 </a:solidFill>
@@ -19913,7 +21293,7 @@
                 <a:cs typeface="Poppins"/>
                 <a:sym typeface="Poppins"/>
               </a:rPr>
-              <a:t>Alcohol supply data only covers 2023-2025 (12 quarters) - far shorter than the 2015-2025 crime/population window. This limits Model B (slide 14) to a much smaller sample.</a:t>
+              <a:t>Alcohol supply data only covers 2023-2025 (12 quarters) - far shorter than the 2015-2025 crime/population window. This limits Model B (Slide 14 to a much smaller sample)</a:t>
             </a:r>
           </a:p>
         </p:txBody>
@@ -31470,4 +32850,287 @@
   <a:objectDefaults/>
   <a:extraClrSchemeLst/>
 </a:theme>
+</file>
+
+<file path=ppt/theme/theme2.xml><?xml version="1.0" encoding="utf-8"?>
+<a:theme xmlns:a="http://schemas.openxmlformats.org/drawingml/2006/main" name="Office Theme">
+  <a:themeElements>
+    <a:clrScheme name="Office">
+      <a:dk1>
+        <a:sysClr val="windowText" lastClr="000000"/>
+      </a:dk1>
+      <a:lt1>
+        <a:sysClr val="window" lastClr="FFFFFF"/>
+      </a:lt1>
+      <a:dk2>
+        <a:srgbClr val="1F497D"/>
+      </a:dk2>
+      <a:lt2>
+        <a:srgbClr val="EEECE1"/>
+      </a:lt2>
+      <a:accent1>
+        <a:srgbClr val="4F81BD"/>
+      </a:accent1>
+      <a:accent2>
+        <a:srgbClr val="C0504D"/>
+      </a:accent2>
+      <a:accent3>
+        <a:srgbClr val="9BBB59"/>
+      </a:accent3>
+      <a:accent4>
+        <a:srgbClr val="8064A2"/>
+      </a:accent4>
+      <a:accent5>
+        <a:srgbClr val="4BACC6"/>
+      </a:accent5>
+      <a:accent6>
+        <a:srgbClr val="F79646"/>
+      </a:accent6>
+      <a:hlink>
+        <a:srgbClr val="0000FF"/>
+      </a:hlink>
+      <a:folHlink>
+        <a:srgbClr val="800080"/>
+      </a:folHlink>
+    </a:clrScheme>
+    <a:fontScheme name="Office">
+      <a:majorFont>
+        <a:latin typeface="Calibri"/>
+        <a:ea typeface=""/>
+        <a:cs typeface=""/>
+        <a:font script="Jpan" typeface="ＭＳ Ｐゴシック"/>
+        <a:font script="Hang" typeface="맑은 고딕"/>
+        <a:font script="Hans" typeface="宋体"/>
+        <a:font script="Hant" typeface="新細明體"/>
+        <a:font script="Arab" typeface="Times New Roman"/>
+        <a:font script="Hebr" typeface="Times New Roman"/>
+        <a:font script="Thai" typeface="Angsana New"/>
+        <a:font script="Ethi" typeface="Nyala"/>
+        <a:font script="Beng" typeface="Vrinda"/>
+        <a:font script="Gujr" typeface="Shruti"/>
+        <a:font script="Khmr" typeface="MoolBoran"/>
+        <a:font script="Knda" typeface="Tunga"/>
+        <a:font script="Guru" typeface="Raavi"/>
+        <a:font script="Cans" typeface="Euphemia"/>
+        <a:font script="Cher" typeface="Plantagenet Cherokee"/>
+        <a:font script="Yiii" typeface="Microsoft Yi Baiti"/>
+        <a:font script="Tibt" typeface="Microsoft Himalaya"/>
+        <a:font script="Thaa" typeface="MV Boli"/>
+        <a:font script="Deva" typeface="Mangal"/>
+        <a:font script="Telu" typeface="Gautami"/>
+        <a:font script="Taml" typeface="Latha"/>
+        <a:font script="Syrc" typeface="Estrangelo Edessa"/>
+        <a:font script="Orya" typeface="Kalinga"/>
+        <a:font script="Mlym" typeface="Kartika"/>
+        <a:font script="Laoo" typeface="DokChampa"/>
+        <a:font script="Sinh" typeface="Iskoola Pota"/>
+        <a:font script="Mong" typeface="Mongolian Baiti"/>
+        <a:font script="Viet" typeface="Times New Roman"/>
+        <a:font script="Uigh" typeface="Microsoft Uighur"/>
+      </a:majorFont>
+      <a:minorFont>
+        <a:latin typeface="Calibri"/>
+        <a:ea typeface=""/>
+        <a:cs typeface=""/>
+        <a:font script="Jpan" typeface="ＭＳ Ｐゴシック"/>
+        <a:font script="Hang" typeface="맑은 고딕"/>
+        <a:font script="Hans" typeface="宋体"/>
+        <a:font script="Hant" typeface="新細明體"/>
+        <a:font script="Arab" typeface="Arial"/>
+        <a:font script="Hebr" typeface="Arial"/>
+        <a:font script="Thai" typeface="Cordia New"/>
+        <a:font script="Ethi" typeface="Nyala"/>
+        <a:font script="Beng" typeface="Vrinda"/>
+        <a:font script="Gujr" typeface="Shruti"/>
+        <a:font script="Khmr" typeface="DaunPenh"/>
+        <a:font script="Knda" typeface="Tunga"/>
+        <a:font script="Guru" typeface="Raavi"/>
+        <a:font script="Cans" typeface="Euphemia"/>
+        <a:font script="Cher" typeface="Plantagenet Cherokee"/>
+        <a:font script="Yiii" typeface="Microsoft Yi Baiti"/>
+        <a:font script="Tibt" typeface="Microsoft Himalaya"/>
+        <a:font script="Thaa" typeface="MV Boli"/>
+        <a:font script="Deva" typeface="Mangal"/>
+        <a:font script="Telu" typeface="Gautami"/>
+        <a:font script="Taml" typeface="Latha"/>
+        <a:font script="Syrc" typeface="Estrangelo Edessa"/>
+        <a:font script="Orya" typeface="Kalinga"/>
+        <a:font script="Mlym" typeface="Kartika"/>
+        <a:font script="Laoo" typeface="DokChampa"/>
+        <a:font script="Sinh" typeface="Iskoola Pota"/>
+        <a:font script="Mong" typeface="Mongolian Baiti"/>
+        <a:font script="Viet" typeface="Arial"/>
+        <a:font script="Uigh" typeface="Microsoft Uighur"/>
+      </a:minorFont>
+    </a:fontScheme>
+    <a:fmtScheme name="Office">
+      <a:fillStyleLst>
+        <a:solidFill>
+          <a:schemeClr val="phClr"/>
+        </a:solidFill>
+        <a:gradFill rotWithShape="1">
+          <a:gsLst>
+            <a:gs pos="0">
+              <a:schemeClr val="phClr">
+                <a:tint val="50000"/>
+                <a:satMod val="300000"/>
+              </a:schemeClr>
+            </a:gs>
+            <a:gs pos="35000">
+              <a:schemeClr val="phClr">
+                <a:tint val="37000"/>
+                <a:satMod val="300000"/>
+              </a:schemeClr>
+            </a:gs>
+            <a:gs pos="100000">
+              <a:schemeClr val="phClr">
+                <a:tint val="15000"/>
+                <a:satMod val="350000"/>
+              </a:schemeClr>
+            </a:gs>
+          </a:gsLst>
+          <a:lin ang="16200000" scaled="1"/>
+        </a:gradFill>
+        <a:gradFill rotWithShape="1">
+          <a:gsLst>
+            <a:gs pos="0">
+              <a:schemeClr val="phClr">
+                <a:shade val="51000"/>
+                <a:satMod val="130000"/>
+              </a:schemeClr>
+            </a:gs>
+            <a:gs pos="80000">
+              <a:schemeClr val="phClr">
+                <a:shade val="93000"/>
+                <a:satMod val="130000"/>
+              </a:schemeClr>
+            </a:gs>
+            <a:gs pos="100000">
+              <a:schemeClr val="phClr">
+                <a:shade val="94000"/>
+                <a:satMod val="135000"/>
+              </a:schemeClr>
+            </a:gs>
+          </a:gsLst>
+          <a:lin ang="16200000" scaled="0"/>
+        </a:gradFill>
+      </a:fillStyleLst>
+      <a:lnStyleLst>
+        <a:ln w="9525" cap="flat" cmpd="sng" algn="ctr">
+          <a:solidFill>
+            <a:schemeClr val="phClr">
+              <a:shade val="95000"/>
+              <a:satMod val="105000"/>
+            </a:schemeClr>
+          </a:solidFill>
+          <a:prstDash val="solid"/>
+        </a:ln>
+        <a:ln w="25400" cap="flat" cmpd="sng" algn="ctr">
+          <a:solidFill>
+            <a:schemeClr val="phClr"/>
+          </a:solidFill>
+          <a:prstDash val="solid"/>
+        </a:ln>
+        <a:ln w="38100" cap="flat" cmpd="sng" algn="ctr">
+          <a:solidFill>
+            <a:schemeClr val="phClr"/>
+          </a:solidFill>
+          <a:prstDash val="solid"/>
+        </a:ln>
+      </a:lnStyleLst>
+      <a:effectStyleLst>
+        <a:effectStyle>
+          <a:effectLst>
+            <a:outerShdw blurRad="40000" dist="20000" dir="5400000" rotWithShape="0">
+              <a:srgbClr val="000000">
+                <a:alpha val="38000"/>
+              </a:srgbClr>
+            </a:outerShdw>
+          </a:effectLst>
+        </a:effectStyle>
+        <a:effectStyle>
+          <a:effectLst>
+            <a:outerShdw blurRad="40000" dist="23000" dir="5400000" rotWithShape="0">
+              <a:srgbClr val="000000">
+                <a:alpha val="35000"/>
+              </a:srgbClr>
+            </a:outerShdw>
+          </a:effectLst>
+        </a:effectStyle>
+        <a:effectStyle>
+          <a:effectLst>
+            <a:outerShdw blurRad="40000" dist="23000" dir="5400000" rotWithShape="0">
+              <a:srgbClr val="000000">
+                <a:alpha val="35000"/>
+              </a:srgbClr>
+            </a:outerShdw>
+          </a:effectLst>
+          <a:scene3d>
+            <a:camera prst="orthographicFront">
+              <a:rot lat="0" lon="0" rev="0"/>
+            </a:camera>
+            <a:lightRig rig="threePt" dir="t">
+              <a:rot lat="0" lon="0" rev="1200000"/>
+            </a:lightRig>
+          </a:scene3d>
+          <a:sp3d>
+            <a:bevelT w="63500" h="25400"/>
+          </a:sp3d>
+        </a:effectStyle>
+      </a:effectStyleLst>
+      <a:bgFillStyleLst>
+        <a:solidFill>
+          <a:schemeClr val="phClr"/>
+        </a:solidFill>
+        <a:gradFill rotWithShape="1">
+          <a:gsLst>
+            <a:gs pos="0">
+              <a:schemeClr val="phClr">
+                <a:tint val="40000"/>
+                <a:satMod val="350000"/>
+              </a:schemeClr>
+            </a:gs>
+            <a:gs pos="40000">
+              <a:schemeClr val="phClr">
+                <a:tint val="45000"/>
+                <a:shade val="99000"/>
+                <a:satMod val="350000"/>
+              </a:schemeClr>
+            </a:gs>
+            <a:gs pos="100000">
+              <a:schemeClr val="phClr">
+                <a:shade val="20000"/>
+                <a:satMod val="255000"/>
+              </a:schemeClr>
+            </a:gs>
+          </a:gsLst>
+          <a:path path="circle">
+            <a:fillToRect l="50000" t="-80000" r="50000" b="180000"/>
+          </a:path>
+        </a:gradFill>
+        <a:gradFill rotWithShape="1">
+          <a:gsLst>
+            <a:gs pos="0">
+              <a:schemeClr val="phClr">
+                <a:tint val="80000"/>
+                <a:satMod val="300000"/>
+              </a:schemeClr>
+            </a:gs>
+            <a:gs pos="100000">
+              <a:schemeClr val="phClr">
+                <a:shade val="30000"/>
+                <a:satMod val="200000"/>
+              </a:schemeClr>
+            </a:gs>
+          </a:gsLst>
+          <a:path path="circle">
+            <a:fillToRect l="50000" t="50000" r="50000" b="50000"/>
+          </a:path>
+        </a:gradFill>
+      </a:bgFillStyleLst>
+    </a:fmtScheme>
+  </a:themeElements>
+  <a:objectDefaults/>
+  <a:extraClrSchemeLst/>
+</a:theme>
 </file>